--- a/public/slides/aa203/lecture_7.pptx
+++ b/public/slides/aa203/lecture_7.pptx
@@ -158,6 +158,62 @@
 </p:presentation>
 </file>
 
+<file path=ppt/changesInfos/changesInfo1.xml><?xml version="1.0" encoding="utf-8"?>
+<pc:chgInfo xmlns:a="http://schemas.openxmlformats.org/drawingml/2006/main" xmlns:r="http://schemas.openxmlformats.org/officeDocument/2006/relationships" xmlns:ac="http://schemas.microsoft.com/office/drawing/2013/main/command" xmlns:pc="http://schemas.microsoft.com/office/powerpoint/2013/main/command">
+  <pc:docChgLst>
+    <pc:chgData name="Daniele Gammelli" userId="292b8a31-f1ba-4b4c-b196-a231dc095d13" providerId="ADAL" clId="{6E670754-AB6A-5789-AA0A-6F6FD9CE3EEA}"/>
+    <pc:docChg chg="modSld">
+      <pc:chgData name="Daniele Gammelli" userId="292b8a31-f1ba-4b4c-b196-a231dc095d13" providerId="ADAL" clId="{6E670754-AB6A-5789-AA0A-6F6FD9CE3EEA}" dt="2026-08-13T21:11:33.748" v="5" actId="20577"/>
+      <pc:docMkLst>
+        <pc:docMk/>
+      </pc:docMkLst>
+      <pc:sldChg chg="modNotesTx">
+        <pc:chgData name="Daniele Gammelli" userId="292b8a31-f1ba-4b4c-b196-a231dc095d13" providerId="ADAL" clId="{6E670754-AB6A-5789-AA0A-6F6FD9CE3EEA}" dt="2026-08-13T21:11:17.882" v="0" actId="20577"/>
+        <pc:sldMkLst>
+          <pc:docMk/>
+          <pc:sldMk cId="1432661843" sldId="375"/>
+        </pc:sldMkLst>
+      </pc:sldChg>
+      <pc:sldChg chg="modNotesTx">
+        <pc:chgData name="Daniele Gammelli" userId="292b8a31-f1ba-4b4c-b196-a231dc095d13" providerId="ADAL" clId="{6E670754-AB6A-5789-AA0A-6F6FD9CE3EEA}" dt="2026-08-13T21:11:24.071" v="1" actId="20577"/>
+        <pc:sldMkLst>
+          <pc:docMk/>
+          <pc:sldMk cId="3653671955" sldId="382"/>
+        </pc:sldMkLst>
+      </pc:sldChg>
+      <pc:sldChg chg="modNotesTx">
+        <pc:chgData name="Daniele Gammelli" userId="292b8a31-f1ba-4b4c-b196-a231dc095d13" providerId="ADAL" clId="{6E670754-AB6A-5789-AA0A-6F6FD9CE3EEA}" dt="2026-08-13T21:11:25.953" v="2" actId="20577"/>
+        <pc:sldMkLst>
+          <pc:docMk/>
+          <pc:sldMk cId="218591607" sldId="383"/>
+        </pc:sldMkLst>
+      </pc:sldChg>
+      <pc:sldChg chg="modNotesTx">
+        <pc:chgData name="Daniele Gammelli" userId="292b8a31-f1ba-4b4c-b196-a231dc095d13" providerId="ADAL" clId="{6E670754-AB6A-5789-AA0A-6F6FD9CE3EEA}" dt="2026-08-13T21:11:28.655" v="3" actId="20577"/>
+        <pc:sldMkLst>
+          <pc:docMk/>
+          <pc:sldMk cId="698234095" sldId="384"/>
+        </pc:sldMkLst>
+      </pc:sldChg>
+      <pc:sldChg chg="modNotesTx">
+        <pc:chgData name="Daniele Gammelli" userId="292b8a31-f1ba-4b4c-b196-a231dc095d13" providerId="ADAL" clId="{6E670754-AB6A-5789-AA0A-6F6FD9CE3EEA}" dt="2026-08-13T21:11:31.989" v="4" actId="20577"/>
+        <pc:sldMkLst>
+          <pc:docMk/>
+          <pc:sldMk cId="2854043560" sldId="385"/>
+        </pc:sldMkLst>
+      </pc:sldChg>
+      <pc:sldChg chg="modNotesTx">
+        <pc:chgData name="Daniele Gammelli" userId="292b8a31-f1ba-4b4c-b196-a231dc095d13" providerId="ADAL" clId="{6E670754-AB6A-5789-AA0A-6F6FD9CE3EEA}" dt="2026-08-13T21:11:33.748" v="5" actId="20577"/>
+        <pc:sldMkLst>
+          <pc:docMk/>
+          <pc:sldMk cId="3780383348" sldId="386"/>
+        </pc:sldMkLst>
+      </pc:sldChg>
+    </pc:docChg>
+  </pc:docChgLst>
+</pc:chgInfo>
+</file>
+
 <file path=ppt/notesMasters/notesMaster1.xml><?xml version="1.0" encoding="utf-8"?>
 <p:notesMaster xmlns:a="http://schemas.openxmlformats.org/drawingml/2006/main" xmlns:r="http://schemas.openxmlformats.org/officeDocument/2006/relationships" xmlns:p="http://schemas.openxmlformats.org/presentationml/2006/main">
   <p:cSld>
@@ -240,7 +296,7 @@
           <a:p>
             <a:fld id="{EBD6F028-2067-3740-AA48-A91E93570B1D}" type="datetimeFigureOut">
               <a:rPr lang="en-US" smtClean="0"/>
-              <a:t>4/18/26</a:t>
+              <a:t>8/13/26</a:t>
             </a:fld>
             <a:endParaRPr lang="en-US"/>
           </a:p>
@@ -635,10 +691,7 @@
           <a:bodyPr/>
           <a:lstStyle/>
           <a:p>
-            <a:r>
-              <a:rPr lang="en-US" dirty="0"/>
-              <a:t>Check shortest path formulation </a:t>
-            </a:r>
+            <a:endParaRPr lang="en-US" dirty="0"/>
           </a:p>
         </p:txBody>
       </p:sp>
@@ -722,711 +775,6 @@
           <a:bodyPr/>
           <a:lstStyle/>
           <a:p>
-            <a:pPr marL="0" marR="0" lvl="0" indent="0" algn="l" defTabSz="914400" rtl="0" eaLnBrk="1" fontAlgn="auto" latinLnBrk="0" hangingPunct="1">
-              <a:lnSpc>
-                <a:spcPct val="100000"/>
-              </a:lnSpc>
-              <a:spcBef>
-                <a:spcPts val="0"/>
-              </a:spcBef>
-              <a:spcAft>
-                <a:spcPts val="0"/>
-              </a:spcAft>
-              <a:buClrTx/>
-              <a:buSzTx/>
-              <a:buFontTx/>
-              <a:buNone/>
-              <a:tabLst/>
-              <a:defRPr/>
-            </a:pPr>
-            <a:r>
-              <a:rPr lang="pt" sz="1200" kern="1200" dirty="0">
-                <a:solidFill>
-                  <a:schemeClr val="tx1"/>
-                </a:solidFill>
-                <a:effectLst/>
-                <a:latin typeface="+mn-lt"/>
-                <a:ea typeface="+mn-ea"/>
-                <a:cs typeface="+mn-cs"/>
-              </a:rPr>
-              <a:t>J_N^*(\</a:t>
-            </a:r>
-            <a:r>
-              <a:rPr lang="pt" sz="1200" kern="1200" dirty="0" err="1">
-                <a:solidFill>
-                  <a:schemeClr val="tx1"/>
-                </a:solidFill>
-                <a:effectLst/>
-                <a:latin typeface="+mn-lt"/>
-                <a:ea typeface="+mn-ea"/>
-                <a:cs typeface="+mn-cs"/>
-              </a:rPr>
-              <a:t>x_N</a:t>
-            </a:r>
-            <a:r>
-              <a:rPr lang="pt" sz="1200" kern="1200" dirty="0">
-                <a:solidFill>
-                  <a:schemeClr val="tx1"/>
-                </a:solidFill>
-                <a:effectLst/>
-                <a:latin typeface="+mn-lt"/>
-                <a:ea typeface="+mn-ea"/>
-                <a:cs typeface="+mn-cs"/>
-              </a:rPr>
-              <a:t>) = \</a:t>
-            </a:r>
-            <a:r>
-              <a:rPr lang="pt" sz="1200" kern="1200" dirty="0" err="1">
-                <a:solidFill>
-                  <a:schemeClr val="tx1"/>
-                </a:solidFill>
-                <a:effectLst/>
-                <a:latin typeface="+mn-lt"/>
-                <a:ea typeface="+mn-ea"/>
-                <a:cs typeface="+mn-cs"/>
-              </a:rPr>
-              <a:t>frac</a:t>
-            </a:r>
-            <a:r>
-              <a:rPr lang="pt" sz="1200" kern="1200" dirty="0">
-                <a:solidFill>
-                  <a:schemeClr val="tx1"/>
-                </a:solidFill>
-                <a:effectLst/>
-                <a:latin typeface="+mn-lt"/>
-                <a:ea typeface="+mn-ea"/>
-                <a:cs typeface="+mn-cs"/>
-              </a:rPr>
-              <a:t>{1}{2}\</a:t>
-            </a:r>
-            <a:r>
-              <a:rPr lang="pt" sz="1200" kern="1200" dirty="0" err="1">
-                <a:solidFill>
-                  <a:schemeClr val="tx1"/>
-                </a:solidFill>
-                <a:effectLst/>
-                <a:latin typeface="+mn-lt"/>
-                <a:ea typeface="+mn-ea"/>
-                <a:cs typeface="+mn-cs"/>
-              </a:rPr>
-              <a:t>x_N</a:t>
-            </a:r>
-            <a:r>
-              <a:rPr lang="pt" sz="1200" kern="1200" dirty="0">
-                <a:solidFill>
-                  <a:schemeClr val="tx1"/>
-                </a:solidFill>
-                <a:effectLst/>
-                <a:latin typeface="+mn-lt"/>
-                <a:ea typeface="+mn-ea"/>
-                <a:cs typeface="+mn-cs"/>
-              </a:rPr>
-              <a:t>^{\prime} H\</a:t>
-            </a:r>
-            <a:r>
-              <a:rPr lang="pt" sz="1200" kern="1200" dirty="0" err="1">
-                <a:solidFill>
-                  <a:schemeClr val="tx1"/>
-                </a:solidFill>
-                <a:effectLst/>
-                <a:latin typeface="+mn-lt"/>
-                <a:ea typeface="+mn-ea"/>
-                <a:cs typeface="+mn-cs"/>
-              </a:rPr>
-              <a:t>x_N</a:t>
-            </a:r>
-            <a:r>
-              <a:rPr lang="pt" sz="1200" kern="1200" dirty="0">
-                <a:solidFill>
-                  <a:schemeClr val="tx1"/>
-                </a:solidFill>
-                <a:effectLst/>
-                <a:latin typeface="+mn-lt"/>
-                <a:ea typeface="+mn-ea"/>
-                <a:cs typeface="+mn-cs"/>
-              </a:rPr>
-              <a:t> := \</a:t>
-            </a:r>
-            <a:r>
-              <a:rPr lang="pt" sz="1200" kern="1200" dirty="0" err="1">
-                <a:solidFill>
-                  <a:schemeClr val="tx1"/>
-                </a:solidFill>
-                <a:effectLst/>
-                <a:latin typeface="+mn-lt"/>
-                <a:ea typeface="+mn-ea"/>
-                <a:cs typeface="+mn-cs"/>
-              </a:rPr>
-              <a:t>frac</a:t>
-            </a:r>
-            <a:r>
-              <a:rPr lang="pt" sz="1200" kern="1200" dirty="0">
-                <a:solidFill>
-                  <a:schemeClr val="tx1"/>
-                </a:solidFill>
-                <a:effectLst/>
-                <a:latin typeface="+mn-lt"/>
-                <a:ea typeface="+mn-ea"/>
-                <a:cs typeface="+mn-cs"/>
-              </a:rPr>
-              <a:t>{1}{2}\</a:t>
-            </a:r>
-            <a:r>
-              <a:rPr lang="pt" sz="1200" kern="1200" dirty="0" err="1">
-                <a:solidFill>
-                  <a:schemeClr val="tx1"/>
-                </a:solidFill>
-                <a:effectLst/>
-                <a:latin typeface="+mn-lt"/>
-                <a:ea typeface="+mn-ea"/>
-                <a:cs typeface="+mn-cs"/>
-              </a:rPr>
-              <a:t>x_N</a:t>
-            </a:r>
-            <a:r>
-              <a:rPr lang="pt" sz="1200" kern="1200" dirty="0">
-                <a:solidFill>
-                  <a:schemeClr val="tx1"/>
-                </a:solidFill>
-                <a:effectLst/>
-                <a:latin typeface="+mn-lt"/>
-                <a:ea typeface="+mn-ea"/>
-                <a:cs typeface="+mn-cs"/>
-              </a:rPr>
-              <a:t>^{\prime} P_N\</a:t>
-            </a:r>
-            <a:r>
-              <a:rPr lang="pt" sz="1200" kern="1200" dirty="0" err="1">
-                <a:solidFill>
-                  <a:schemeClr val="tx1"/>
-                </a:solidFill>
-                <a:effectLst/>
-                <a:latin typeface="+mn-lt"/>
-                <a:ea typeface="+mn-ea"/>
-                <a:cs typeface="+mn-cs"/>
-              </a:rPr>
-              <a:t>x_N</a:t>
-            </a:r>
-            <a:endParaRPr lang="pt" sz="1200" kern="1200" dirty="0">
-              <a:solidFill>
-                <a:schemeClr val="tx1"/>
-              </a:solidFill>
-              <a:effectLst/>
-              <a:latin typeface="+mn-lt"/>
-              <a:ea typeface="+mn-ea"/>
-              <a:cs typeface="+mn-cs"/>
-            </a:endParaRPr>
-          </a:p>
-          <a:p>
-            <a:endParaRPr lang="en-US" dirty="0"/>
-          </a:p>
-          <a:p>
-            <a:r>
-              <a:rPr lang="en-US" sz="1200" kern="1200" dirty="0">
-                <a:solidFill>
-                  <a:schemeClr val="tx1"/>
-                </a:solidFill>
-                <a:effectLst/>
-                <a:latin typeface="+mn-lt"/>
-                <a:ea typeface="+mn-ea"/>
-                <a:cs typeface="+mn-cs"/>
-              </a:rPr>
-              <a:t>\begin{equation*}</a:t>
-            </a:r>
-          </a:p>
-          <a:p>
-            <a:r>
-              <a:rPr lang="en-US" sz="1200" kern="1200" dirty="0">
-                <a:solidFill>
-                  <a:schemeClr val="tx1"/>
-                </a:solidFill>
-                <a:effectLst/>
-                <a:latin typeface="+mn-lt"/>
-                <a:ea typeface="+mn-ea"/>
-                <a:cs typeface="+mn-cs"/>
-              </a:rPr>
-              <a:t>\begin{split}</a:t>
-            </a:r>
-          </a:p>
-          <a:p>
-            <a:r>
-              <a:rPr lang="en-US" sz="1200" kern="1200" dirty="0">
-                <a:solidFill>
-                  <a:schemeClr val="tx1"/>
-                </a:solidFill>
-                <a:effectLst/>
-                <a:latin typeface="+mn-lt"/>
-                <a:ea typeface="+mn-ea"/>
-                <a:cs typeface="+mn-cs"/>
-              </a:rPr>
-              <a:t>J_{N-1}(\x_{N-1}) =&amp; \min_{\</a:t>
-            </a:r>
-            <a:r>
-              <a:rPr lang="en-US" sz="1200" kern="1200" dirty="0" err="1">
-                <a:solidFill>
-                  <a:schemeClr val="tx1"/>
-                </a:solidFill>
-                <a:effectLst/>
-                <a:latin typeface="+mn-lt"/>
-                <a:ea typeface="+mn-ea"/>
-                <a:cs typeface="+mn-cs"/>
-              </a:rPr>
-              <a:t>uc</a:t>
-            </a:r>
-            <a:r>
-              <a:rPr lang="en-US" sz="1200" kern="1200" dirty="0">
-                <a:solidFill>
-                  <a:schemeClr val="tx1"/>
-                </a:solidFill>
-                <a:effectLst/>
-                <a:latin typeface="+mn-lt"/>
-                <a:ea typeface="+mn-ea"/>
-                <a:cs typeface="+mn-cs"/>
-              </a:rPr>
-              <a:t>_{N-1}}\, \,  \</a:t>
-            </a:r>
-            <a:r>
-              <a:rPr lang="en-US" sz="1200" kern="1200" dirty="0" err="1">
-                <a:solidFill>
-                  <a:schemeClr val="tx1"/>
-                </a:solidFill>
-                <a:effectLst/>
-                <a:latin typeface="+mn-lt"/>
-                <a:ea typeface="+mn-ea"/>
-                <a:cs typeface="+mn-cs"/>
-              </a:rPr>
-              <a:t>frac</a:t>
-            </a:r>
-            <a:r>
-              <a:rPr lang="en-US" sz="1200" kern="1200" dirty="0">
-                <a:solidFill>
-                  <a:schemeClr val="tx1"/>
-                </a:solidFill>
-                <a:effectLst/>
-                <a:latin typeface="+mn-lt"/>
-                <a:ea typeface="+mn-ea"/>
-                <a:cs typeface="+mn-cs"/>
-              </a:rPr>
-              <a:t>{1}{2} \</a:t>
-            </a:r>
-            <a:r>
-              <a:rPr lang="en-US" sz="1200" kern="1200" dirty="0" err="1">
-                <a:solidFill>
-                  <a:schemeClr val="tx1"/>
-                </a:solidFill>
-                <a:effectLst/>
-                <a:latin typeface="+mn-lt"/>
-                <a:ea typeface="+mn-ea"/>
-                <a:cs typeface="+mn-cs"/>
-              </a:rPr>
-              <a:t>biggl</a:t>
-            </a:r>
-            <a:r>
-              <a:rPr lang="en-US" sz="1200" kern="1200" dirty="0">
-                <a:solidFill>
-                  <a:schemeClr val="tx1"/>
-                </a:solidFill>
-                <a:effectLst/>
-                <a:latin typeface="+mn-lt"/>
-                <a:ea typeface="+mn-ea"/>
-                <a:cs typeface="+mn-cs"/>
-              </a:rPr>
-              <a:t> \{ \x_{N-1}^{\prime} Q \x_{N-1} + \</a:t>
-            </a:r>
-            <a:r>
-              <a:rPr lang="en-US" sz="1200" kern="1200" dirty="0" err="1">
-                <a:solidFill>
-                  <a:schemeClr val="tx1"/>
-                </a:solidFill>
-                <a:effectLst/>
-                <a:latin typeface="+mn-lt"/>
-                <a:ea typeface="+mn-ea"/>
-                <a:cs typeface="+mn-cs"/>
-              </a:rPr>
-              <a:t>uc</a:t>
-            </a:r>
-            <a:r>
-              <a:rPr lang="en-US" sz="1200" kern="1200" dirty="0">
-                <a:solidFill>
-                  <a:schemeClr val="tx1"/>
-                </a:solidFill>
-                <a:effectLst/>
-                <a:latin typeface="+mn-lt"/>
-                <a:ea typeface="+mn-ea"/>
-                <a:cs typeface="+mn-cs"/>
-              </a:rPr>
-              <a:t>_{N-1}^{\prime} R \</a:t>
-            </a:r>
-            <a:r>
-              <a:rPr lang="en-US" sz="1200" kern="1200" dirty="0" err="1">
-                <a:solidFill>
-                  <a:schemeClr val="tx1"/>
-                </a:solidFill>
-                <a:effectLst/>
-                <a:latin typeface="+mn-lt"/>
-                <a:ea typeface="+mn-ea"/>
-                <a:cs typeface="+mn-cs"/>
-              </a:rPr>
-              <a:t>uc</a:t>
-            </a:r>
-            <a:r>
-              <a:rPr lang="en-US" sz="1200" kern="1200" dirty="0">
-                <a:solidFill>
-                  <a:schemeClr val="tx1"/>
-                </a:solidFill>
-                <a:effectLst/>
-                <a:latin typeface="+mn-lt"/>
-                <a:ea typeface="+mn-ea"/>
-                <a:cs typeface="+mn-cs"/>
-              </a:rPr>
-              <a:t>_{N-1}  + \</a:t>
-            </a:r>
-            <a:r>
-              <a:rPr lang="en-US" sz="1200" kern="1200" dirty="0" err="1">
-                <a:solidFill>
-                  <a:schemeClr val="tx1"/>
-                </a:solidFill>
-                <a:effectLst/>
-                <a:latin typeface="+mn-lt"/>
-                <a:ea typeface="+mn-ea"/>
-                <a:cs typeface="+mn-cs"/>
-              </a:rPr>
-              <a:t>x_N</a:t>
-            </a:r>
-            <a:r>
-              <a:rPr lang="en-US" sz="1200" kern="1200" dirty="0">
-                <a:solidFill>
-                  <a:schemeClr val="tx1"/>
-                </a:solidFill>
-                <a:effectLst/>
-                <a:latin typeface="+mn-lt"/>
-                <a:ea typeface="+mn-ea"/>
-                <a:cs typeface="+mn-cs"/>
-              </a:rPr>
-              <a:t>^{\prime} H \</a:t>
-            </a:r>
-            <a:r>
-              <a:rPr lang="en-US" sz="1200" kern="1200" dirty="0" err="1">
-                <a:solidFill>
-                  <a:schemeClr val="tx1"/>
-                </a:solidFill>
-                <a:effectLst/>
-                <a:latin typeface="+mn-lt"/>
-                <a:ea typeface="+mn-ea"/>
-                <a:cs typeface="+mn-cs"/>
-              </a:rPr>
-              <a:t>x_N</a:t>
-            </a:r>
-            <a:r>
-              <a:rPr lang="en-US" sz="1200" kern="1200" dirty="0">
-                <a:solidFill>
-                  <a:schemeClr val="tx1"/>
-                </a:solidFill>
-                <a:effectLst/>
-                <a:latin typeface="+mn-lt"/>
-                <a:ea typeface="+mn-ea"/>
-                <a:cs typeface="+mn-cs"/>
-              </a:rPr>
-              <a:t> \</a:t>
-            </a:r>
-            <a:r>
-              <a:rPr lang="en-US" sz="1200" kern="1200" dirty="0" err="1">
-                <a:solidFill>
-                  <a:schemeClr val="tx1"/>
-                </a:solidFill>
-                <a:effectLst/>
-                <a:latin typeface="+mn-lt"/>
-                <a:ea typeface="+mn-ea"/>
-                <a:cs typeface="+mn-cs"/>
-              </a:rPr>
-              <a:t>biggr</a:t>
-            </a:r>
-            <a:r>
-              <a:rPr lang="en-US" sz="1200" kern="1200" dirty="0">
-                <a:solidFill>
-                  <a:schemeClr val="tx1"/>
-                </a:solidFill>
-                <a:effectLst/>
-                <a:latin typeface="+mn-lt"/>
-                <a:ea typeface="+mn-ea"/>
-                <a:cs typeface="+mn-cs"/>
-              </a:rPr>
-              <a:t> \}\\</a:t>
-            </a:r>
-          </a:p>
-          <a:p>
-            <a:r>
-              <a:rPr lang="en-US" sz="1200" kern="1200" dirty="0">
-                <a:solidFill>
-                  <a:schemeClr val="tx1"/>
-                </a:solidFill>
-                <a:effectLst/>
-                <a:latin typeface="+mn-lt"/>
-                <a:ea typeface="+mn-ea"/>
-                <a:cs typeface="+mn-cs"/>
-              </a:rPr>
-              <a:t>&amp;\min_{\</a:t>
-            </a:r>
-            <a:r>
-              <a:rPr lang="en-US" sz="1200" kern="1200" dirty="0" err="1">
-                <a:solidFill>
-                  <a:schemeClr val="tx1"/>
-                </a:solidFill>
-                <a:effectLst/>
-                <a:latin typeface="+mn-lt"/>
-                <a:ea typeface="+mn-ea"/>
-                <a:cs typeface="+mn-cs"/>
-              </a:rPr>
-              <a:t>uc</a:t>
-            </a:r>
-            <a:r>
-              <a:rPr lang="en-US" sz="1200" kern="1200" dirty="0">
-                <a:solidFill>
-                  <a:schemeClr val="tx1"/>
-                </a:solidFill>
-                <a:effectLst/>
-                <a:latin typeface="+mn-lt"/>
-                <a:ea typeface="+mn-ea"/>
-                <a:cs typeface="+mn-cs"/>
-              </a:rPr>
-              <a:t>_{N-1}}\, \,  \</a:t>
-            </a:r>
-            <a:r>
-              <a:rPr lang="en-US" sz="1200" kern="1200" dirty="0" err="1">
-                <a:solidFill>
-                  <a:schemeClr val="tx1"/>
-                </a:solidFill>
-                <a:effectLst/>
-                <a:latin typeface="+mn-lt"/>
-                <a:ea typeface="+mn-ea"/>
-                <a:cs typeface="+mn-cs"/>
-              </a:rPr>
-              <a:t>frac</a:t>
-            </a:r>
-            <a:r>
-              <a:rPr lang="en-US" sz="1200" kern="1200" dirty="0">
-                <a:solidFill>
-                  <a:schemeClr val="tx1"/>
-                </a:solidFill>
-                <a:effectLst/>
-                <a:latin typeface="+mn-lt"/>
-                <a:ea typeface="+mn-ea"/>
-                <a:cs typeface="+mn-cs"/>
-              </a:rPr>
-              <a:t>{1}{2} \</a:t>
-            </a:r>
-            <a:r>
-              <a:rPr lang="en-US" sz="1200" kern="1200" dirty="0" err="1">
-                <a:solidFill>
-                  <a:schemeClr val="tx1"/>
-                </a:solidFill>
-                <a:effectLst/>
-                <a:latin typeface="+mn-lt"/>
-                <a:ea typeface="+mn-ea"/>
-                <a:cs typeface="+mn-cs"/>
-              </a:rPr>
-              <a:t>biggl</a:t>
-            </a:r>
-            <a:r>
-              <a:rPr lang="en-US" sz="1200" kern="1200" dirty="0">
-                <a:solidFill>
-                  <a:schemeClr val="tx1"/>
-                </a:solidFill>
-                <a:effectLst/>
-                <a:latin typeface="+mn-lt"/>
-                <a:ea typeface="+mn-ea"/>
-                <a:cs typeface="+mn-cs"/>
-              </a:rPr>
-              <a:t> \{ \x_{N-1}^{\prime} Q \x_{N-1} + \</a:t>
-            </a:r>
-            <a:r>
-              <a:rPr lang="en-US" sz="1200" kern="1200" dirty="0" err="1">
-                <a:solidFill>
-                  <a:schemeClr val="tx1"/>
-                </a:solidFill>
-                <a:effectLst/>
-                <a:latin typeface="+mn-lt"/>
-                <a:ea typeface="+mn-ea"/>
-                <a:cs typeface="+mn-cs"/>
-              </a:rPr>
-              <a:t>uc</a:t>
-            </a:r>
-            <a:r>
-              <a:rPr lang="en-US" sz="1200" kern="1200" dirty="0">
-                <a:solidFill>
-                  <a:schemeClr val="tx1"/>
-                </a:solidFill>
-                <a:effectLst/>
-                <a:latin typeface="+mn-lt"/>
-                <a:ea typeface="+mn-ea"/>
-                <a:cs typeface="+mn-cs"/>
-              </a:rPr>
-              <a:t>_{N-1}^{\prime} R \</a:t>
-            </a:r>
-            <a:r>
-              <a:rPr lang="en-US" sz="1200" kern="1200" dirty="0" err="1">
-                <a:solidFill>
-                  <a:schemeClr val="tx1"/>
-                </a:solidFill>
-                <a:effectLst/>
-                <a:latin typeface="+mn-lt"/>
-                <a:ea typeface="+mn-ea"/>
-                <a:cs typeface="+mn-cs"/>
-              </a:rPr>
-              <a:t>uc</a:t>
-            </a:r>
-            <a:r>
-              <a:rPr lang="en-US" sz="1200" kern="1200" dirty="0">
-                <a:solidFill>
-                  <a:schemeClr val="tx1"/>
-                </a:solidFill>
-                <a:effectLst/>
-                <a:latin typeface="+mn-lt"/>
-                <a:ea typeface="+mn-ea"/>
-                <a:cs typeface="+mn-cs"/>
-              </a:rPr>
-              <a:t>_{N-1}  +\\</a:t>
-            </a:r>
-          </a:p>
-          <a:p>
-            <a:r>
-              <a:rPr lang="en-US" sz="1200" kern="1200" dirty="0">
-                <a:solidFill>
-                  <a:schemeClr val="tx1"/>
-                </a:solidFill>
-                <a:effectLst/>
-                <a:latin typeface="+mn-lt"/>
-                <a:ea typeface="+mn-ea"/>
-                <a:cs typeface="+mn-cs"/>
-              </a:rPr>
-              <a:t>&amp;\</a:t>
-            </a:r>
-            <a:r>
-              <a:rPr lang="en-US" sz="1200" kern="1200" dirty="0" err="1">
-                <a:solidFill>
-                  <a:schemeClr val="tx1"/>
-                </a:solidFill>
-                <a:effectLst/>
-                <a:latin typeface="+mn-lt"/>
-                <a:ea typeface="+mn-ea"/>
-                <a:cs typeface="+mn-cs"/>
-              </a:rPr>
-              <a:t>qquad</a:t>
-            </a:r>
-            <a:r>
-              <a:rPr lang="en-US" sz="1200" kern="1200" dirty="0">
-                <a:solidFill>
-                  <a:schemeClr val="tx1"/>
-                </a:solidFill>
-                <a:effectLst/>
-                <a:latin typeface="+mn-lt"/>
-                <a:ea typeface="+mn-ea"/>
-                <a:cs typeface="+mn-cs"/>
-              </a:rPr>
-              <a:t> \quad (A_{N-1}\x_{N-1} + B_{N-1}\</a:t>
-            </a:r>
-            <a:r>
-              <a:rPr lang="en-US" sz="1200" kern="1200" dirty="0" err="1">
-                <a:solidFill>
-                  <a:schemeClr val="tx1"/>
-                </a:solidFill>
-                <a:effectLst/>
-                <a:latin typeface="+mn-lt"/>
-                <a:ea typeface="+mn-ea"/>
-                <a:cs typeface="+mn-cs"/>
-              </a:rPr>
-              <a:t>uc</a:t>
-            </a:r>
-            <a:r>
-              <a:rPr lang="en-US" sz="1200" kern="1200" dirty="0">
-                <a:solidFill>
-                  <a:schemeClr val="tx1"/>
-                </a:solidFill>
-                <a:effectLst/>
-                <a:latin typeface="+mn-lt"/>
-                <a:ea typeface="+mn-ea"/>
-                <a:cs typeface="+mn-cs"/>
-              </a:rPr>
-              <a:t>_{N-1})^{\prime} H (A_{N-1}\x_{N-1} + B_{N-1}\</a:t>
-            </a:r>
-            <a:r>
-              <a:rPr lang="en-US" sz="1200" kern="1200" dirty="0" err="1">
-                <a:solidFill>
-                  <a:schemeClr val="tx1"/>
-                </a:solidFill>
-                <a:effectLst/>
-                <a:latin typeface="+mn-lt"/>
-                <a:ea typeface="+mn-ea"/>
-                <a:cs typeface="+mn-cs"/>
-              </a:rPr>
-              <a:t>uc</a:t>
-            </a:r>
-            <a:r>
-              <a:rPr lang="en-US" sz="1200" kern="1200" dirty="0">
-                <a:solidFill>
-                  <a:schemeClr val="tx1"/>
-                </a:solidFill>
-                <a:effectLst/>
-                <a:latin typeface="+mn-lt"/>
-                <a:ea typeface="+mn-ea"/>
-                <a:cs typeface="+mn-cs"/>
-              </a:rPr>
-              <a:t>_{N-1}) \</a:t>
-            </a:r>
-            <a:r>
-              <a:rPr lang="en-US" sz="1200" kern="1200" dirty="0" err="1">
-                <a:solidFill>
-                  <a:schemeClr val="tx1"/>
-                </a:solidFill>
-                <a:effectLst/>
-                <a:latin typeface="+mn-lt"/>
-                <a:ea typeface="+mn-ea"/>
-                <a:cs typeface="+mn-cs"/>
-              </a:rPr>
-              <a:t>biggr</a:t>
-            </a:r>
-            <a:r>
-              <a:rPr lang="en-US" sz="1200" kern="1200" dirty="0">
-                <a:solidFill>
-                  <a:schemeClr val="tx1"/>
-                </a:solidFill>
-                <a:effectLst/>
-                <a:latin typeface="+mn-lt"/>
-                <a:ea typeface="+mn-ea"/>
-                <a:cs typeface="+mn-cs"/>
-              </a:rPr>
-              <a:t> \}</a:t>
-            </a:r>
-          </a:p>
-          <a:p>
-            <a:r>
-              <a:rPr lang="en-US" sz="1200" kern="1200" dirty="0">
-                <a:solidFill>
-                  <a:schemeClr val="tx1"/>
-                </a:solidFill>
-                <a:effectLst/>
-                <a:latin typeface="+mn-lt"/>
-                <a:ea typeface="+mn-ea"/>
-                <a:cs typeface="+mn-cs"/>
-              </a:rPr>
-              <a:t>\end{split}</a:t>
-            </a:r>
-          </a:p>
-          <a:p>
-            <a:r>
-              <a:rPr lang="en-US" sz="1200" kern="1200" dirty="0">
-                <a:solidFill>
-                  <a:schemeClr val="tx1"/>
-                </a:solidFill>
-                <a:effectLst/>
-                <a:latin typeface="+mn-lt"/>
-                <a:ea typeface="+mn-ea"/>
-                <a:cs typeface="+mn-cs"/>
-              </a:rPr>
-              <a:t>\end{equation*}</a:t>
-            </a:r>
-          </a:p>
-          <a:p>
             <a:endParaRPr lang="en-US" dirty="0"/>
           </a:p>
         </p:txBody>
@@ -1528,139 +876,7 @@
               <a:tabLst/>
               <a:defRPr/>
             </a:pPr>
-            <a:r>
-              <a:rPr lang="en-US" sz="1200" kern="1200" dirty="0">
-                <a:solidFill>
-                  <a:schemeClr val="tx1"/>
-                </a:solidFill>
-                <a:effectLst/>
-                <a:latin typeface="+mn-lt"/>
-                <a:ea typeface="+mn-ea"/>
-                <a:cs typeface="+mn-cs"/>
-              </a:rPr>
-              <a:t>\</a:t>
-            </a:r>
-            <a:r>
-              <a:rPr lang="en-US" sz="1200" kern="1200" dirty="0" err="1">
-                <a:solidFill>
-                  <a:schemeClr val="tx1"/>
-                </a:solidFill>
-                <a:effectLst/>
-                <a:latin typeface="+mn-lt"/>
-                <a:ea typeface="+mn-ea"/>
-                <a:cs typeface="+mn-cs"/>
-              </a:rPr>
-              <a:t>frac</a:t>
-            </a:r>
-            <a:r>
-              <a:rPr lang="en-US" sz="1200" kern="1200" dirty="0">
-                <a:solidFill>
-                  <a:schemeClr val="tx1"/>
-                </a:solidFill>
-                <a:effectLst/>
-                <a:latin typeface="+mn-lt"/>
-                <a:ea typeface="+mn-ea"/>
-                <a:cs typeface="+mn-cs"/>
-              </a:rPr>
-              <a:t>{\partial J^*_{N-1}(\x_{N-1})}{\partial \</a:t>
-            </a:r>
-            <a:r>
-              <a:rPr lang="en-US" sz="1200" kern="1200" dirty="0" err="1">
-                <a:solidFill>
-                  <a:schemeClr val="tx1"/>
-                </a:solidFill>
-                <a:effectLst/>
-                <a:latin typeface="+mn-lt"/>
-                <a:ea typeface="+mn-ea"/>
-                <a:cs typeface="+mn-cs"/>
-              </a:rPr>
-              <a:t>uc</a:t>
-            </a:r>
-            <a:r>
-              <a:rPr lang="en-US" sz="1200" kern="1200" dirty="0">
-                <a:solidFill>
-                  <a:schemeClr val="tx1"/>
-                </a:solidFill>
-                <a:effectLst/>
-                <a:latin typeface="+mn-lt"/>
-                <a:ea typeface="+mn-ea"/>
-                <a:cs typeface="+mn-cs"/>
-              </a:rPr>
-              <a:t>_{N-1}} = R\</a:t>
-            </a:r>
-            <a:r>
-              <a:rPr lang="en-US" sz="1200" kern="1200" dirty="0" err="1">
-                <a:solidFill>
-                  <a:schemeClr val="tx1"/>
-                </a:solidFill>
-                <a:effectLst/>
-                <a:latin typeface="+mn-lt"/>
-                <a:ea typeface="+mn-ea"/>
-                <a:cs typeface="+mn-cs"/>
-              </a:rPr>
-              <a:t>uc</a:t>
-            </a:r>
-            <a:r>
-              <a:rPr lang="en-US" sz="1200" kern="1200" dirty="0">
-                <a:solidFill>
-                  <a:schemeClr val="tx1"/>
-                </a:solidFill>
-                <a:effectLst/>
-                <a:latin typeface="+mn-lt"/>
-                <a:ea typeface="+mn-ea"/>
-                <a:cs typeface="+mn-cs"/>
-              </a:rPr>
-              <a:t>_{N-1} + B^{\prime}_{N-1}H(A_{N-1}\x_{N-1} + B_{N-1}\</a:t>
-            </a:r>
-            <a:r>
-              <a:rPr lang="en-US" sz="1200" kern="1200" dirty="0" err="1">
-                <a:solidFill>
-                  <a:schemeClr val="tx1"/>
-                </a:solidFill>
-                <a:effectLst/>
-                <a:latin typeface="+mn-lt"/>
-                <a:ea typeface="+mn-ea"/>
-                <a:cs typeface="+mn-cs"/>
-              </a:rPr>
-              <a:t>uc</a:t>
-            </a:r>
-            <a:r>
-              <a:rPr lang="en-US" sz="1200" kern="1200" dirty="0">
-                <a:solidFill>
-                  <a:schemeClr val="tx1"/>
-                </a:solidFill>
-                <a:effectLst/>
-                <a:latin typeface="+mn-lt"/>
-                <a:ea typeface="+mn-ea"/>
-                <a:cs typeface="+mn-cs"/>
-              </a:rPr>
-              <a:t>_{N-1}) = 0</a:t>
-            </a:r>
-          </a:p>
-          <a:p>
             <a:endParaRPr lang="en-US" dirty="0"/>
-          </a:p>
-          <a:p>
-            <a:r>
-              <a:rPr lang="en-US" dirty="0"/>
-              <a:t>\</a:t>
-            </a:r>
-            <a:r>
-              <a:rPr lang="en-US" dirty="0" err="1"/>
-              <a:t>frac</a:t>
-            </a:r>
-            <a:r>
-              <a:rPr lang="en-US" dirty="0"/>
-              <a:t>{\partial^2 J^*_{N-1}(\x_{N-1})}{\partial \</a:t>
-            </a:r>
-            <a:r>
-              <a:rPr lang="en-US" dirty="0" err="1"/>
-              <a:t>uc</a:t>
-            </a:r>
-            <a:r>
-              <a:rPr lang="en-US" dirty="0"/>
-              <a:t>_{N-1}^2} = R + B_{N-1}^{\prime}HB_{N-1}&gt;0</a:t>
-            </a:r>
           </a:p>
         </p:txBody>
       </p:sp>
@@ -1744,35 +960,7 @@
           <a:bodyPr/>
           <a:lstStyle/>
           <a:p>
-            <a:r>
-              <a:rPr lang="en-US" dirty="0"/>
-              <a:t> (R+B^{\prime}_{N-1}HB_{N-1}) \</a:t>
-            </a:r>
-            <a:r>
-              <a:rPr lang="en-US" dirty="0" err="1"/>
-              <a:t>uc</a:t>
-            </a:r>
-            <a:r>
-              <a:rPr lang="en-US" dirty="0"/>
-              <a:t>^*_{N-1} + B^{\prime}_{N-1}H A_{N-1}\x_{N-1}  = 0</a:t>
-            </a:r>
-          </a:p>
-          <a:p>
             <a:endParaRPr lang="en-US" dirty="0"/>
-          </a:p>
-          <a:p>
-            <a:r>
-              <a:rPr lang="en-US" dirty="0"/>
-              <a:t>\</a:t>
-            </a:r>
-            <a:r>
-              <a:rPr lang="en-US" dirty="0" err="1"/>
-              <a:t>uc</a:t>
-            </a:r>
-            <a:r>
-              <a:rPr lang="en-US" dirty="0"/>
-              <a:t>^*_{N-1} = - (R+B^{\prime}_{N-1}HB_{N-1})^{-1}B^{\prime}_{N-1}H A_{N-1}\x_{N-1}:=F_{N-1}\x_{N-1}</a:t>
-            </a:r>
           </a:p>
         </p:txBody>
       </p:sp>
@@ -1856,84 +1044,7 @@
           <a:bodyPr/>
           <a:lstStyle/>
           <a:p>
-            <a:r>
-              <a:rPr lang="en-US" dirty="0"/>
-              <a:t>\begin{equation*}</a:t>
-            </a:r>
-          </a:p>
-          <a:p>
-            <a:r>
-              <a:rPr lang="en-US" dirty="0"/>
-              <a:t>\begin{split}</a:t>
-            </a:r>
-          </a:p>
-          <a:p>
-            <a:r>
-              <a:rPr lang="en-US" dirty="0"/>
-              <a:t>J_{N-1}(\x_{N-1}) =&amp;\</a:t>
-            </a:r>
-            <a:r>
-              <a:rPr lang="en-US" dirty="0" err="1"/>
-              <a:t>frac</a:t>
-            </a:r>
-            <a:r>
-              <a:rPr lang="en-US" dirty="0"/>
-              <a:t>{1}{2} \x_{N-1}^{\prime} \</a:t>
-            </a:r>
-            <a:r>
-              <a:rPr lang="en-US" dirty="0" err="1"/>
-              <a:t>biggl</a:t>
-            </a:r>
-            <a:r>
-              <a:rPr lang="en-US" dirty="0"/>
-              <a:t> \{  Q  + F_{N-1}^{\prime} R F_{N-1}  +\\</a:t>
-            </a:r>
-          </a:p>
-          <a:p>
-            <a:r>
-              <a:rPr lang="en-US" dirty="0"/>
-              <a:t>&amp;\</a:t>
-            </a:r>
-            <a:r>
-              <a:rPr lang="en-US" dirty="0" err="1"/>
-              <a:t>qquad</a:t>
-            </a:r>
-            <a:r>
-              <a:rPr lang="en-US" dirty="0"/>
-              <a:t>  (A_{N-1}+ B_{N-1}F_{N-1})^{\prime} H (A_{N-1}+ B_{N-1}F_{N-1}) \</a:t>
-            </a:r>
-            <a:r>
-              <a:rPr lang="en-US" dirty="0" err="1"/>
-              <a:t>biggr</a:t>
-            </a:r>
-            <a:r>
-              <a:rPr lang="en-US" dirty="0"/>
-              <a:t> \}\x_{N-1}\\</a:t>
-            </a:r>
-          </a:p>
-          <a:p>
-            <a:r>
-              <a:rPr lang="en-US" dirty="0"/>
-              <a:t>:=&amp;\x_{N-1}^{\prime}P_{N-1}\x_{N-1}\\</a:t>
-            </a:r>
-          </a:p>
-          <a:p>
-            <a:r>
-              <a:rPr lang="en-US" dirty="0"/>
-              <a:t>F_{N-1} =&amp;  - (R+B^{\prime}_{N-1} P_N B_{N-1})^{-1}B^{\prime}_{N-1} P_N A_{N-1}</a:t>
-            </a:r>
-          </a:p>
-          <a:p>
-            <a:r>
-              <a:rPr lang="en-US" dirty="0"/>
-              <a:t>\end{split}</a:t>
-            </a:r>
-          </a:p>
-          <a:p>
-            <a:r>
-              <a:rPr lang="en-US" dirty="0"/>
-              <a:t>\end{equation*}</a:t>
-            </a:r>
+            <a:endParaRPr lang="en-US" dirty="0"/>
           </a:p>
         </p:txBody>
       </p:sp>
@@ -2017,214 +1128,6 @@
           <a:bodyPr/>
           <a:lstStyle/>
           <a:p>
-            <a:r>
-              <a:rPr lang="en-US" sz="1200" kern="1200" dirty="0">
-                <a:solidFill>
-                  <a:schemeClr val="tx1"/>
-                </a:solidFill>
-                <a:effectLst/>
-                <a:latin typeface="+mn-lt"/>
-                <a:ea typeface="+mn-ea"/>
-                <a:cs typeface="+mn-cs"/>
-              </a:rPr>
-              <a:t>\begin{equation*}</a:t>
-            </a:r>
-          </a:p>
-          <a:p>
-            <a:r>
-              <a:rPr lang="en-US" sz="1200" kern="1200" dirty="0">
-                <a:solidFill>
-                  <a:schemeClr val="tx1"/>
-                </a:solidFill>
-                <a:effectLst/>
-                <a:latin typeface="+mn-lt"/>
-                <a:ea typeface="+mn-ea"/>
-                <a:cs typeface="+mn-cs"/>
-              </a:rPr>
-              <a:t>\begin{split}</a:t>
-            </a:r>
-          </a:p>
-          <a:p>
-            <a:r>
-              <a:rPr lang="en-US" sz="1200" kern="1200" dirty="0">
-                <a:solidFill>
-                  <a:schemeClr val="tx1"/>
-                </a:solidFill>
-                <a:effectLst/>
-                <a:latin typeface="+mn-lt"/>
-                <a:ea typeface="+mn-ea"/>
-                <a:cs typeface="+mn-cs"/>
-              </a:rPr>
-              <a:t>J_{N-1}(\x_{N-1}) =&amp;\</a:t>
-            </a:r>
-            <a:r>
-              <a:rPr lang="en-US" sz="1200" kern="1200" dirty="0" err="1">
-                <a:solidFill>
-                  <a:schemeClr val="tx1"/>
-                </a:solidFill>
-                <a:effectLst/>
-                <a:latin typeface="+mn-lt"/>
-                <a:ea typeface="+mn-ea"/>
-                <a:cs typeface="+mn-cs"/>
-              </a:rPr>
-              <a:t>frac</a:t>
-            </a:r>
-            <a:r>
-              <a:rPr lang="en-US" sz="1200" kern="1200" dirty="0">
-                <a:solidFill>
-                  <a:schemeClr val="tx1"/>
-                </a:solidFill>
-                <a:effectLst/>
-                <a:latin typeface="+mn-lt"/>
-                <a:ea typeface="+mn-ea"/>
-                <a:cs typeface="+mn-cs"/>
-              </a:rPr>
-              <a:t>{1}{2} \x_{N-1}^{\prime} \</a:t>
-            </a:r>
-            <a:r>
-              <a:rPr lang="en-US" sz="1200" kern="1200" dirty="0" err="1">
-                <a:solidFill>
-                  <a:schemeClr val="tx1"/>
-                </a:solidFill>
-                <a:effectLst/>
-                <a:latin typeface="+mn-lt"/>
-                <a:ea typeface="+mn-ea"/>
-                <a:cs typeface="+mn-cs"/>
-              </a:rPr>
-              <a:t>biggl</a:t>
-            </a:r>
-            <a:r>
-              <a:rPr lang="en-US" sz="1200" kern="1200" dirty="0">
-                <a:solidFill>
-                  <a:schemeClr val="tx1"/>
-                </a:solidFill>
-                <a:effectLst/>
-                <a:latin typeface="+mn-lt"/>
-                <a:ea typeface="+mn-ea"/>
-                <a:cs typeface="+mn-cs"/>
-              </a:rPr>
-              <a:t> \{  Q  + F_{N-1}^{\prime} R F_{N-1}  +\\</a:t>
-            </a:r>
-          </a:p>
-          <a:p>
-            <a:r>
-              <a:rPr lang="en-US" sz="1200" kern="1200" dirty="0">
-                <a:solidFill>
-                  <a:schemeClr val="tx1"/>
-                </a:solidFill>
-                <a:effectLst/>
-                <a:latin typeface="+mn-lt"/>
-                <a:ea typeface="+mn-ea"/>
-                <a:cs typeface="+mn-cs"/>
-              </a:rPr>
-              <a:t>&amp;\</a:t>
-            </a:r>
-            <a:r>
-              <a:rPr lang="en-US" sz="1200" kern="1200" dirty="0" err="1">
-                <a:solidFill>
-                  <a:schemeClr val="tx1"/>
-                </a:solidFill>
-                <a:effectLst/>
-                <a:latin typeface="+mn-lt"/>
-                <a:ea typeface="+mn-ea"/>
-                <a:cs typeface="+mn-cs"/>
-              </a:rPr>
-              <a:t>qquad</a:t>
-            </a:r>
-            <a:r>
-              <a:rPr lang="en-US" sz="1200" kern="1200" dirty="0">
-                <a:solidFill>
-                  <a:schemeClr val="tx1"/>
-                </a:solidFill>
-                <a:effectLst/>
-                <a:latin typeface="+mn-lt"/>
-                <a:ea typeface="+mn-ea"/>
-                <a:cs typeface="+mn-cs"/>
-              </a:rPr>
-              <a:t>  (A_{N-1}+ B_{N-1}F_{N-1})^{\prime} H (A_{N-1}+ B_{N-1}F_{N-1}) \</a:t>
-            </a:r>
-            <a:r>
-              <a:rPr lang="en-US" sz="1200" kern="1200" dirty="0" err="1">
-                <a:solidFill>
-                  <a:schemeClr val="tx1"/>
-                </a:solidFill>
-                <a:effectLst/>
-                <a:latin typeface="+mn-lt"/>
-                <a:ea typeface="+mn-ea"/>
-                <a:cs typeface="+mn-cs"/>
-              </a:rPr>
-              <a:t>biggr</a:t>
-            </a:r>
-            <a:r>
-              <a:rPr lang="en-US" sz="1200" kern="1200" dirty="0">
-                <a:solidFill>
-                  <a:schemeClr val="tx1"/>
-                </a:solidFill>
-                <a:effectLst/>
-                <a:latin typeface="+mn-lt"/>
-                <a:ea typeface="+mn-ea"/>
-                <a:cs typeface="+mn-cs"/>
-              </a:rPr>
-              <a:t> \}\x_{N-1}\\</a:t>
-            </a:r>
-          </a:p>
-          <a:p>
-            <a:r>
-              <a:rPr lang="en-US" sz="1200" kern="1200" dirty="0">
-                <a:solidFill>
-                  <a:schemeClr val="tx1"/>
-                </a:solidFill>
-                <a:effectLst/>
-                <a:latin typeface="+mn-lt"/>
-                <a:ea typeface="+mn-ea"/>
-                <a:cs typeface="+mn-cs"/>
-              </a:rPr>
-              <a:t>:=&amp;\x_{N-1}^{\prime}P_{N-1}\x_{N-1}\\</a:t>
-            </a:r>
-          </a:p>
-          <a:p>
-            <a:r>
-              <a:rPr lang="en-US" sz="1200" kern="1200" dirty="0">
-                <a:solidFill>
-                  <a:schemeClr val="tx1"/>
-                </a:solidFill>
-                <a:effectLst/>
-                <a:latin typeface="+mn-lt"/>
-                <a:ea typeface="+mn-ea"/>
-                <a:cs typeface="+mn-cs"/>
-              </a:rPr>
-              <a:t>F_{N-1} =&amp;  - (R+B^{\prime}_{N-1} P_N B_{N-1})^{-1}B^{\prime}_{N-1} P_N A_{N-1}</a:t>
-            </a:r>
-          </a:p>
-          <a:p>
-            <a:r>
-              <a:rPr lang="en-US" sz="1200" kern="1200" dirty="0">
-                <a:solidFill>
-                  <a:schemeClr val="tx1"/>
-                </a:solidFill>
-                <a:effectLst/>
-                <a:latin typeface="+mn-lt"/>
-                <a:ea typeface="+mn-ea"/>
-                <a:cs typeface="+mn-cs"/>
-              </a:rPr>
-              <a:t>\end{split}</a:t>
-            </a:r>
-          </a:p>
-          <a:p>
-            <a:r>
-              <a:rPr lang="en-US" sz="1200" kern="1200" dirty="0">
-                <a:solidFill>
-                  <a:schemeClr val="tx1"/>
-                </a:solidFill>
-                <a:effectLst/>
-                <a:latin typeface="+mn-lt"/>
-                <a:ea typeface="+mn-ea"/>
-                <a:cs typeface="+mn-cs"/>
-              </a:rPr>
-              <a:t>\end{equation*}</a:t>
-            </a:r>
-          </a:p>
-          <a:p>
             <a:endParaRPr lang="en-US" dirty="0"/>
           </a:p>
         </p:txBody>
@@ -2394,7 +1297,7 @@
           <a:p>
             <a:fld id="{713BC89D-58DA-634B-8296-F8CCA53359BB}" type="datetime1">
               <a:rPr lang="en-US" smtClean="0"/>
-              <a:t>4/18/26</a:t>
+              <a:t>8/13/26</a:t>
             </a:fld>
             <a:endParaRPr lang="en-US" dirty="0"/>
           </a:p>
@@ -2612,7 +1515,7 @@
           <a:p>
             <a:fld id="{F4DCE35A-1E1A-0544-BED7-1276695905BE}" type="datetime1">
               <a:rPr lang="en-US" smtClean="0"/>
-              <a:t>4/18/26</a:t>
+              <a:t>8/13/26</a:t>
             </a:fld>
             <a:endParaRPr lang="en-US"/>
           </a:p>
@@ -2794,7 +1697,7 @@
           <a:p>
             <a:fld id="{1C7F2EA1-1CA5-CF43-A07E-B47B8296C778}" type="datetime1">
               <a:rPr lang="en-US" smtClean="0"/>
-              <a:t>4/18/26</a:t>
+              <a:t>8/13/26</a:t>
             </a:fld>
             <a:endParaRPr lang="en-US"/>
           </a:p>
@@ -2971,7 +1874,7 @@
           <a:p>
             <a:fld id="{14857810-C9CE-AA41-B3E8-2CD7B9F9D4E5}" type="datetime1">
               <a:rPr lang="en-US" smtClean="0"/>
-              <a:t>4/18/26</a:t>
+              <a:t>8/13/26</a:t>
             </a:fld>
             <a:endParaRPr lang="en-US"/>
           </a:p>
@@ -3276,7 +2179,7 @@
           <a:p>
             <a:fld id="{BF52ABE7-9B40-DA43-A54E-0E2D84F36135}" type="datetime1">
               <a:rPr lang="en-US" smtClean="0"/>
-              <a:t>4/18/26</a:t>
+              <a:t>8/13/26</a:t>
             </a:fld>
             <a:endParaRPr lang="en-US"/>
           </a:p>
@@ -3509,7 +2412,7 @@
           <a:p>
             <a:fld id="{88ED33F0-B807-5741-B59B-CFE301968AC1}" type="datetime1">
               <a:rPr lang="en-US" smtClean="0"/>
-              <a:t>4/18/26</a:t>
+              <a:t>8/13/26</a:t>
             </a:fld>
             <a:endParaRPr lang="en-US"/>
           </a:p>
@@ -3877,7 +2780,7 @@
           <a:p>
             <a:fld id="{F220F9E4-D7EC-714F-AA82-A05540119E6D}" type="datetime1">
               <a:rPr lang="en-US" smtClean="0"/>
-              <a:t>4/18/26</a:t>
+              <a:t>8/13/26</a:t>
             </a:fld>
             <a:endParaRPr lang="en-US"/>
           </a:p>
@@ -3998,7 +2901,7 @@
           <a:p>
             <a:fld id="{154D35CA-BAB6-4F41-849C-BB01D2B75BD3}" type="datetime1">
               <a:rPr lang="en-US" smtClean="0"/>
-              <a:t>4/18/26</a:t>
+              <a:t>8/13/26</a:t>
             </a:fld>
             <a:endParaRPr lang="en-US"/>
           </a:p>
@@ -4097,7 +3000,7 @@
           <a:p>
             <a:fld id="{DC30FC45-891D-574F-904A-3B6D3149C595}" type="datetime1">
               <a:rPr lang="en-US" smtClean="0"/>
-              <a:t>4/18/26</a:t>
+              <a:t>8/13/26</a:t>
             </a:fld>
             <a:endParaRPr lang="en-US"/>
           </a:p>
@@ -4376,7 +3279,7 @@
           <a:p>
             <a:fld id="{EA75A11B-141F-1F42-A8DE-73EF08CD622A}" type="datetime1">
               <a:rPr lang="en-US" smtClean="0"/>
-              <a:t>4/18/26</a:t>
+              <a:t>8/13/26</a:t>
             </a:fld>
             <a:endParaRPr lang="en-US"/>
           </a:p>
@@ -4632,7 +3535,7 @@
           <a:p>
             <a:fld id="{0CBF2307-F840-674A-8564-1547B11E3D23}" type="datetime1">
               <a:rPr lang="en-US" smtClean="0"/>
-              <a:t>4/18/26</a:t>
+              <a:t>8/13/26</a:t>
             </a:fld>
             <a:endParaRPr lang="en-US"/>
           </a:p>
@@ -4847,7 +3750,7 @@
           <a:p>
             <a:fld id="{DA5D63E8-79C5-4E4F-8FCA-D23D4E833E66}" type="datetime1">
               <a:rPr lang="en-US" smtClean="0"/>
-              <a:t>4/18/26</a:t>
+              <a:t>8/13/26</a:t>
             </a:fld>
             <a:endParaRPr lang="en-US"/>
           </a:p>
@@ -5439,7 +4342,7 @@
                     <m:sSub>
                       <m:sSubPr>
                         <m:ctrlPr>
-                          <a:rPr lang="en-US" sz="2600" b="1" i="1" dirty="0" smtClean="0">
+                          <a:rPr lang="en-US" sz="2600" b="1" i="0" dirty="0" smtClean="0">
                             <a:latin typeface="Cambria Math" panose="02040503050406030204" pitchFamily="18" charset="0"/>
                           </a:rPr>
                         </m:ctrlPr>
@@ -5482,7 +4385,7 @@
                     <m:d>
                       <m:dPr>
                         <m:ctrlPr>
-                          <a:rPr lang="en-US" sz="2600" i="1" dirty="0">
+                          <a:rPr lang="en-US" sz="2600" b="1" i="1" dirty="0" err="1">
                             <a:latin typeface="Cambria Math" panose="02040503050406030204" pitchFamily="18" charset="0"/>
                           </a:rPr>
                         </m:ctrlPr>
@@ -5491,7 +4394,7 @@
                         <m:sSub>
                           <m:sSubPr>
                             <m:ctrlPr>
-                              <a:rPr lang="en-US" sz="2600" b="1" i="1" dirty="0" err="1">
+                              <a:rPr lang="en-US" sz="2600" b="1" dirty="0" err="1">
                                 <a:latin typeface="Cambria Math" panose="02040503050406030204" pitchFamily="18" charset="0"/>
                               </a:rPr>
                             </m:ctrlPr>
@@ -5522,7 +4425,7 @@
                         <m:sSub>
                           <m:sSubPr>
                             <m:ctrlPr>
-                              <a:rPr lang="en-US" sz="2600" i="1" dirty="0" err="1">
+                              <a:rPr lang="en-US" sz="2600" b="1" dirty="0">
                                 <a:latin typeface="Cambria Math" panose="02040503050406030204" pitchFamily="18" charset="0"/>
                               </a:rPr>
                             </m:ctrlPr>
@@ -5567,7 +4470,7 @@
                     <m:sSub>
                       <m:sSubPr>
                         <m:ctrlPr>
-                          <a:rPr lang="en-US" sz="2600" b="1" i="1" dirty="0">
+                          <a:rPr lang="en-US" sz="2600" b="1" i="0" dirty="0" smtClean="0">
                             <a:latin typeface="Cambria Math" panose="02040503050406030204" pitchFamily="18" charset="0"/>
                           </a:rPr>
                         </m:ctrlPr>
@@ -5616,7 +4519,7 @@
                     <m:sSub>
                       <m:sSubPr>
                         <m:ctrlPr>
-                          <a:rPr lang="en-US" sz="2600" i="1" dirty="0">
+                          <a:rPr lang="en-US" sz="2600" b="1" dirty="0">
                             <a:latin typeface="Cambria Math" panose="02040503050406030204" pitchFamily="18" charset="0"/>
                           </a:rPr>
                         </m:ctrlPr>
@@ -5670,7 +4573,7 @@
                     <m:sSub>
                       <m:sSubPr>
                         <m:ctrlPr>
-                          <a:rPr lang="en-US" sz="2600" b="1" i="1" dirty="0" smtClean="0">
+                          <a:rPr lang="en-US" sz="2600" b="1" i="0" dirty="0" smtClean="0">
                             <a:latin typeface="Cambria Math" panose="02040503050406030204" pitchFamily="18" charset="0"/>
                           </a:rPr>
                         </m:ctrlPr>
@@ -5723,7 +4626,7 @@
                           <a:rPr lang="en-US" sz="2600" i="1" dirty="0" err="1">
                             <a:latin typeface="Cambria Math" panose="02040503050406030204" pitchFamily="18" charset="0"/>
                           </a:rPr>
-                          <m:t>h</m:t>
+                          <m:t>ℎ</m:t>
                         </m:r>
                       </m:e>
                       <m:sub>
@@ -5738,7 +4641,7 @@
                     <m:d>
                       <m:dPr>
                         <m:ctrlPr>
-                          <a:rPr lang="en-US" sz="2600" i="1" dirty="0">
+                          <a:rPr lang="en-US" sz="2600" b="1" i="1" dirty="0">
                             <a:latin typeface="Cambria Math" panose="02040503050406030204" pitchFamily="18" charset="0"/>
                           </a:rPr>
                         </m:ctrlPr>
@@ -5747,7 +4650,7 @@
                         <m:sSub>
                           <m:sSubPr>
                             <m:ctrlPr>
-                              <a:rPr lang="en-US" sz="2600" b="1" i="1" dirty="0">
+                              <a:rPr lang="en-US" sz="2600" b="1" dirty="0">
                                 <a:latin typeface="Cambria Math" panose="02040503050406030204" pitchFamily="18" charset="0"/>
                               </a:rPr>
                             </m:ctrlPr>
@@ -5827,7 +4730,7 @@
                         <m:d>
                           <m:dPr>
                             <m:ctrlPr>
-                              <a:rPr lang="en-US" sz="2600" i="1" dirty="0">
+                              <a:rPr lang="en-US" sz="2600" b="1" i="1" dirty="0" err="1">
                                 <a:latin typeface="Cambria Math" panose="02040503050406030204" pitchFamily="18" charset="0"/>
                               </a:rPr>
                             </m:ctrlPr>
@@ -5836,7 +4739,7 @@
                             <m:sSub>
                               <m:sSubPr>
                                 <m:ctrlPr>
-                                  <a:rPr lang="en-US" sz="2600" b="1" i="1" dirty="0" err="1">
+                                  <a:rPr lang="en-US" sz="2600" b="1" dirty="0" err="1">
                                     <a:latin typeface="Cambria Math" panose="02040503050406030204" pitchFamily="18" charset="0"/>
                                   </a:rPr>
                                 </m:ctrlPr>
@@ -5867,7 +4770,7 @@
                             <m:sSub>
                               <m:sSubPr>
                                 <m:ctrlPr>
-                                  <a:rPr lang="en-US" sz="2600" i="1" dirty="0" err="1">
+                                  <a:rPr lang="en-US" sz="2600" b="0" i="1" dirty="0" smtClean="0">
                                     <a:latin typeface="Cambria Math" panose="02040503050406030204" pitchFamily="18" charset="0"/>
                                   </a:rPr>
                                 </m:ctrlPr>
@@ -5984,7 +4887,7 @@
                     <m:sSub>
                       <m:sSubPr>
                         <m:ctrlPr>
-                          <a:rPr lang="en-US" sz="2600" b="1" i="1" smtClean="0">
+                          <a:rPr lang="en-US" sz="2600" b="1" i="0" smtClean="0">
                             <a:latin typeface="Cambria Math" panose="02040503050406030204" pitchFamily="18" charset="0"/>
                           </a:rPr>
                         </m:ctrlPr>
@@ -6051,7 +4954,7 @@
                     <m:sSub>
                       <m:sSubPr>
                         <m:ctrlPr>
-                          <a:rPr lang="en-US" sz="2600" b="1" i="1" dirty="0" smtClean="0">
+                          <a:rPr lang="en-US" sz="2600" b="1" i="0" dirty="0" smtClean="0">
                             <a:latin typeface="Cambria Math" panose="02040503050406030204" pitchFamily="18" charset="0"/>
                           </a:rPr>
                         </m:ctrlPr>
@@ -6124,7 +5027,7 @@
                     <m:sSub>
                       <m:sSubPr>
                         <m:ctrlPr>
-                          <a:rPr lang="en-US" sz="2600" i="1" dirty="0" smtClean="0">
+                          <a:rPr lang="en-US" sz="2600" b="1" i="0" dirty="0" smtClean="0">
                             <a:latin typeface="Cambria Math" panose="02040503050406030204" pitchFamily="18" charset="0"/>
                           </a:rPr>
                         </m:ctrlPr>
@@ -6214,10 +5117,7 @@
                 </a:pPr>
                 <a14:m>
                   <m:oMathPara xmlns:m="http://schemas.openxmlformats.org/officeDocument/2006/math">
-                    <m:oMathParaPr>
-                      <m:jc m:val="centerGroup"/>
-                    </m:oMathParaPr>
-                    <m:oMath xmlns:m="http://schemas.openxmlformats.org/officeDocument/2006/math">
+                    <m:oMath>
                       <m:sSub>
                         <m:sSubPr>
                           <m:ctrlPr>
@@ -6252,7 +5152,7 @@
                       <m:sSub>
                         <m:sSubPr>
                           <m:ctrlPr>
-                            <a:rPr lang="en-US" sz="2600" i="1" dirty="0" err="1">
+                            <a:rPr lang="en-US" sz="2600" b="1" i="0" dirty="0" err="1">
                               <a:latin typeface="Cambria Math" panose="02040503050406030204" pitchFamily="18" charset="0"/>
                             </a:rPr>
                           </m:ctrlPr>
@@ -6293,7 +5193,7 @@
                             <a:rPr lang="en-US" sz="2600" i="1" dirty="0" err="1">
                               <a:latin typeface="Cambria Math" panose="02040503050406030204" pitchFamily="18" charset="0"/>
                             </a:rPr>
-                            <m:t>h</m:t>
+                            <m:t>ℎ</m:t>
                           </m:r>
                         </m:e>
                         <m:sub>
@@ -6314,7 +5214,7 @@
                       <m:sSub>
                         <m:sSubPr>
                           <m:ctrlPr>
-                            <a:rPr lang="en-US" sz="2600" i="1" dirty="0" err="1">
+                            <a:rPr lang="en-US" sz="2600" b="1" i="0" dirty="0" err="1">
                               <a:latin typeface="Cambria Math" panose="02040503050406030204" pitchFamily="18" charset="0"/>
                             </a:rPr>
                           </m:ctrlPr>
@@ -6365,14 +5265,11 @@
                 </a:pPr>
                 <a14:m>
                   <m:oMathPara xmlns:m="http://schemas.openxmlformats.org/officeDocument/2006/math">
-                    <m:oMathParaPr>
-                      <m:jc m:val="centerGroup"/>
-                    </m:oMathParaPr>
-                    <m:oMath xmlns:m="http://schemas.openxmlformats.org/officeDocument/2006/math">
+                    <m:oMath>
                       <m:sSub>
                         <m:sSubPr>
                           <m:ctrlPr>
-                            <a:rPr lang="en-US" sz="2600" i="1" dirty="0" err="1" smtClean="0">
+                            <a:rPr lang="en-US" sz="2600" i="1" dirty="0" smtClean="0">
                               <a:latin typeface="Cambria Math" panose="02040503050406030204" pitchFamily="18" charset="0"/>
                             </a:rPr>
                           </m:ctrlPr>
@@ -6397,7 +5294,7 @@
                       <m:d>
                         <m:dPr>
                           <m:ctrlPr>
-                            <a:rPr lang="en-US" sz="2600" i="1" dirty="0">
+                            <a:rPr lang="en-US" sz="2600" b="1" i="1" dirty="0" smtClean="0">
                               <a:latin typeface="Cambria Math" panose="02040503050406030204" pitchFamily="18" charset="0"/>
                             </a:rPr>
                           </m:ctrlPr>
@@ -6406,7 +5303,7 @@
                           <m:sSub>
                             <m:sSubPr>
                               <m:ctrlPr>
-                                <a:rPr lang="en-US" sz="2600" b="1" i="1" dirty="0" smtClean="0">
+                                <a:rPr lang="en-US" sz="2600" b="1" i="0" dirty="0" smtClean="0">
                                   <a:latin typeface="Cambria Math" panose="02040503050406030204" pitchFamily="18" charset="0"/>
                                 </a:rPr>
                               </m:ctrlPr>
@@ -6439,7 +5336,7 @@
                       <m:limLow>
                         <m:limLowPr>
                           <m:ctrlPr>
-                            <a:rPr lang="en-US" sz="2600" i="1" dirty="0">
+                            <a:rPr lang="en-US" sz="2600" i="0" dirty="0">
                               <a:latin typeface="Cambria Math" panose="02040503050406030204" pitchFamily="18" charset="0"/>
                             </a:rPr>
                           </m:ctrlPr>
@@ -6459,7 +5356,7 @@
                           <m:sSub>
                             <m:sSubPr>
                               <m:ctrlPr>
-                                <a:rPr lang="en-US" sz="2600" b="1" i="1" dirty="0" smtClean="0">
+                                <a:rPr lang="en-US" sz="2600" b="1" i="0" dirty="0" smtClean="0">
                                   <a:latin typeface="Cambria Math" panose="02040503050406030204" pitchFamily="18" charset="0"/>
                                 </a:rPr>
                               </m:ctrlPr>
@@ -6502,7 +5399,7 @@
                           <m:sSub>
                             <m:sSubPr>
                               <m:ctrlPr>
-                                <a:rPr lang="en-US" sz="2600" i="1" dirty="0" smtClean="0">
+                                <a:rPr lang="en-US" sz="2600" b="1" i="0" dirty="0" smtClean="0">
                                   <a:latin typeface="Cambria Math" panose="02040503050406030204" pitchFamily="18" charset="0"/>
                                 </a:rPr>
                               </m:ctrlPr>
@@ -6547,7 +5444,7 @@
                       <m:d>
                         <m:dPr>
                           <m:ctrlPr>
-                            <a:rPr lang="en-US" sz="2600" i="1" dirty="0">
+                            <a:rPr lang="en-US" sz="2600" b="1" i="1" dirty="0" err="1">
                               <a:latin typeface="Cambria Math" panose="02040503050406030204" pitchFamily="18" charset="0"/>
                             </a:rPr>
                           </m:ctrlPr>
@@ -6556,7 +5453,7 @@
                           <m:sSub>
                             <m:sSubPr>
                               <m:ctrlPr>
-                                <a:rPr lang="en-US" sz="2600" b="1" i="1" dirty="0" err="1">
+                                <a:rPr lang="en-US" sz="2600" b="1" i="0" dirty="0" err="1">
                                   <a:latin typeface="Cambria Math" panose="02040503050406030204" pitchFamily="18" charset="0"/>
                                 </a:rPr>
                               </m:ctrlPr>
@@ -6587,7 +5484,7 @@
                           <m:sSub>
                             <m:sSubPr>
                               <m:ctrlPr>
-                                <a:rPr lang="en-US" sz="2600" i="1" dirty="0" err="1">
+                                <a:rPr lang="en-US" sz="2600" b="1" i="0" dirty="0" smtClean="0">
                                   <a:latin typeface="Cambria Math" panose="02040503050406030204" pitchFamily="18" charset="0"/>
                                 </a:rPr>
                               </m:ctrlPr>
@@ -6663,7 +5560,7 @@
                       <m:d>
                         <m:dPr>
                           <m:ctrlPr>
-                            <a:rPr lang="en-US" sz="2600" i="1" dirty="0">
+                            <a:rPr lang="en-US" sz="2600" b="0" i="1" dirty="0" smtClean="0">
                               <a:latin typeface="Cambria Math" panose="02040503050406030204" pitchFamily="18" charset="0"/>
                             </a:rPr>
                           </m:ctrlPr>
@@ -6678,7 +5575,7 @@
                           <m:d>
                             <m:dPr>
                               <m:ctrlPr>
-                                <a:rPr lang="en-US" sz="2600" i="1" dirty="0">
+                                <a:rPr lang="en-US" sz="2600" b="1" i="1" dirty="0" err="1">
                                   <a:latin typeface="Cambria Math" panose="02040503050406030204" pitchFamily="18" charset="0"/>
                                 </a:rPr>
                               </m:ctrlPr>
@@ -6687,7 +5584,7 @@
                               <m:sSub>
                                 <m:sSubPr>
                                   <m:ctrlPr>
-                                    <a:rPr lang="en-US" sz="2600" b="1" i="1" dirty="0" err="1">
+                                    <a:rPr lang="en-US" sz="2600" b="1" dirty="0" err="1">
                                       <a:latin typeface="Cambria Math" panose="02040503050406030204" pitchFamily="18" charset="0"/>
                                     </a:rPr>
                                   </m:ctrlPr>
@@ -6718,7 +5615,7 @@
                               <m:sSub>
                                 <m:sSubPr>
                                   <m:ctrlPr>
-                                    <a:rPr lang="en-US" sz="2600" i="1" dirty="0" err="1">
+                                    <a:rPr lang="en-US" sz="2600" b="1" dirty="0">
                                       <a:latin typeface="Cambria Math" panose="02040503050406030204" pitchFamily="18" charset="0"/>
                                     </a:rPr>
                                   </m:ctrlPr>
@@ -6822,7 +5719,7 @@
                     <m:sSubSup>
                       <m:sSubSupPr>
                         <m:ctrlPr>
-                          <a:rPr lang="en-US" sz="2600" b="1" i="1" dirty="0" smtClean="0">
+                          <a:rPr lang="en-US" sz="2600" b="1" dirty="0">
                             <a:latin typeface="Cambria Math" panose="02040503050406030204" pitchFamily="18" charset="0"/>
                           </a:rPr>
                         </m:ctrlPr>
@@ -6900,7 +5797,7 @@
                     <m:sSub>
                       <m:sSubPr>
                         <m:ctrlPr>
-                          <a:rPr lang="en-US" sz="2600" b="1" i="1" dirty="0">
+                          <a:rPr lang="en-US" sz="2600" b="1" dirty="0" err="1">
                             <a:latin typeface="Cambria Math" panose="02040503050406030204" pitchFamily="18" charset="0"/>
                           </a:rPr>
                         </m:ctrlPr>
@@ -6936,7 +5833,7 @@
                     <m:sSub>
                       <m:sSubPr>
                         <m:ctrlPr>
-                          <a:rPr lang="en-US" sz="2600" b="1" i="1" dirty="0">
+                          <a:rPr lang="en-US" sz="2600" b="1" dirty="0" err="1">
                             <a:latin typeface="Cambria Math" panose="02040503050406030204" pitchFamily="18" charset="0"/>
                           </a:rPr>
                         </m:ctrlPr>
@@ -7198,7 +6095,7 @@
           <a:p>
             <a:fld id="{4B64EBAC-B927-D54E-8BA5-C882D2B4C03F}" type="datetime1">
               <a:rPr lang="en-US" smtClean="0"/>
-              <a:t>4/18/26</a:t>
+              <a:t>8/13/26</a:t>
             </a:fld>
             <a:endParaRPr lang="en-US"/>
           </a:p>
@@ -7626,7 +6523,7 @@
           <a:p>
             <a:fld id="{4B64EBAC-B927-D54E-8BA5-C882D2B4C03F}" type="datetime1">
               <a:rPr lang="en-US" smtClean="0"/>
-              <a:t>4/18/26</a:t>
+              <a:t>8/13/26</a:t>
             </a:fld>
             <a:endParaRPr lang="en-US"/>
           </a:p>
@@ -7829,10 +6726,7 @@
                 </a:pPr>
                 <a14:m>
                   <m:oMathPara xmlns:m="http://schemas.openxmlformats.org/officeDocument/2006/math">
-                    <m:oMathParaPr>
-                      <m:jc m:val="centerGroup"/>
-                    </m:oMathParaPr>
-                    <m:oMath xmlns:m="http://schemas.openxmlformats.org/officeDocument/2006/math">
+                    <m:oMath>
                       <m:r>
                         <a:rPr lang="en-US" i="1">
                           <a:latin typeface="Cambria Math" panose="02040503050406030204" pitchFamily="18" charset="0"/>
@@ -7842,7 +6736,7 @@
                       <m:d>
                         <m:dPr>
                           <m:ctrlPr>
-                            <a:rPr lang="en-US" i="1">
+                            <a:rPr lang="en-US" b="1" i="1">
                               <a:latin typeface="Cambria Math" panose="02040503050406030204" pitchFamily="18" charset="0"/>
                             </a:rPr>
                           </m:ctrlPr>
@@ -7851,7 +6745,7 @@
                           <m:sSub>
                             <m:sSubPr>
                               <m:ctrlPr>
-                                <a:rPr lang="en-US" b="1" i="1">
+                                <a:rPr lang="en-US" b="1" i="0">
                                   <a:latin typeface="Cambria Math" panose="02040503050406030204" pitchFamily="18" charset="0"/>
                                 </a:rPr>
                               </m:ctrlPr>
@@ -7884,7 +6778,7 @@
                       <m:f>
                         <m:fPr>
                           <m:ctrlPr>
-                            <a:rPr lang="en-US" i="1" smtClean="0">
+                            <a:rPr lang="en-US" b="0" i="1" smtClean="0">
                               <a:latin typeface="Cambria Math" panose="02040503050406030204" pitchFamily="18" charset="0"/>
                             </a:rPr>
                           </m:ctrlPr>
@@ -7909,7 +6803,7 @@
                       <m:sSubSup>
                         <m:sSubSupPr>
                           <m:ctrlPr>
-                            <a:rPr lang="en-US" i="1">
+                            <a:rPr lang="en-US" b="1" i="0">
                               <a:latin typeface="Cambria Math" panose="02040503050406030204" pitchFamily="18" charset="0"/>
                             </a:rPr>
                           </m:ctrlPr>
@@ -7960,7 +6854,7 @@
                       <m:sSub>
                         <m:sSubPr>
                           <m:ctrlPr>
-                            <a:rPr lang="en-US" b="1" i="1">
+                            <a:rPr lang="en-US" b="1" i="0">
                               <a:latin typeface="Cambria Math" panose="02040503050406030204" pitchFamily="18" charset="0"/>
                             </a:rPr>
                           </m:ctrlPr>
@@ -8017,7 +6911,7 @@
                         <m:naryPr>
                           <m:chr m:val="∑"/>
                           <m:ctrlPr>
-                            <a:rPr lang="en-US" i="1" smtClean="0">
+                            <a:rPr lang="en-US" b="0" i="1" smtClean="0">
                               <a:latin typeface="Cambria Math" panose="02040503050406030204" pitchFamily="18" charset="0"/>
                             </a:rPr>
                           </m:ctrlPr>
@@ -8057,7 +6951,7 @@
                           <m:sSubSup>
                             <m:sSubSupPr>
                               <m:ctrlPr>
-                                <a:rPr lang="en-US" i="1">
+                                <a:rPr lang="en-US" b="0" i="1" smtClean="0">
                                   <a:latin typeface="Cambria Math" panose="02040503050406030204" pitchFamily="18" charset="0"/>
                                 </a:rPr>
                               </m:ctrlPr>
@@ -8114,7 +7008,7 @@
                           <m:sSub>
                             <m:sSubPr>
                               <m:ctrlPr>
-                                <a:rPr lang="en-US" i="1">
+                                <a:rPr lang="en-US" b="1" i="0">
                                   <a:latin typeface="Cambria Math" panose="02040503050406030204" pitchFamily="18" charset="0"/>
                                 </a:rPr>
                               </m:ctrlPr>
@@ -8145,7 +7039,7 @@
                           <m:sSubSup>
                             <m:sSubSupPr>
                               <m:ctrlPr>
-                                <a:rPr lang="en-US" i="1">
+                                <a:rPr lang="en-US" b="1" i="0">
                                   <a:latin typeface="Cambria Math" panose="02040503050406030204" pitchFamily="18" charset="0"/>
                                 </a:rPr>
                               </m:ctrlPr>
@@ -8196,7 +7090,7 @@
                           <m:sSub>
                             <m:sSubPr>
                               <m:ctrlPr>
-                                <a:rPr lang="en-US" b="1" i="1">
+                                <a:rPr lang="en-US" b="1" i="0">
                                   <a:latin typeface="Cambria Math" panose="02040503050406030204" pitchFamily="18" charset="0"/>
                                 </a:rPr>
                               </m:ctrlPr>
@@ -8228,7 +7122,7 @@
                             <m:rPr>
                               <m:nor/>
                             </m:rPr>
-                            <a:rPr lang="en-US" dirty="0">
+                            <a:rPr lang="en-US" i="0" dirty="0">
                               <a:latin typeface="Source Sans Pro" panose="020B0503030403020204" pitchFamily="34" charset="0"/>
                               <a:ea typeface="Source Sans Pro" panose="020B0503030403020204" pitchFamily="34" charset="0"/>
                             </a:rPr>
@@ -8262,14 +7156,11 @@
                 </a:pPr>
                 <a14:m>
                   <m:oMathPara xmlns:m="http://schemas.openxmlformats.org/officeDocument/2006/math">
-                    <m:oMathParaPr>
-                      <m:jc m:val="centerGroup"/>
-                    </m:oMathParaPr>
-                    <m:oMath xmlns:m="http://schemas.openxmlformats.org/officeDocument/2006/math">
+                    <m:oMath>
                       <m:sSub>
                         <m:sSubPr>
                           <m:ctrlPr>
-                            <a:rPr lang="en-US" b="1" i="1">
+                            <a:rPr lang="en-US" b="1" i="0">
                               <a:latin typeface="Cambria Math" panose="02040503050406030204" pitchFamily="18" charset="0"/>
                             </a:rPr>
                           </m:ctrlPr>
@@ -8331,7 +7222,7 @@
                       <m:sSub>
                         <m:sSubPr>
                           <m:ctrlPr>
-                            <a:rPr lang="en-US" b="1" i="1">
+                            <a:rPr lang="en-US" b="1" i="0">
                               <a:latin typeface="Cambria Math" panose="02040503050406030204" pitchFamily="18" charset="0"/>
                             </a:rPr>
                           </m:ctrlPr>
@@ -8393,7 +7284,7 @@
                       <m:sSub>
                         <m:sSubPr>
                           <m:ctrlPr>
-                            <a:rPr lang="en-US" b="1" i="1">
+                            <a:rPr lang="en-US" b="1" i="0">
                               <a:latin typeface="Cambria Math" panose="02040503050406030204" pitchFamily="18" charset="0"/>
                             </a:rPr>
                           </m:ctrlPr>
@@ -8509,7 +7400,7 @@
                     <m:sSup>
                       <m:sSupPr>
                         <m:ctrlPr>
-                          <a:rPr lang="pt" b="0" i="1" dirty="0">
+                          <a:rPr lang="pt" b="0" i="1" dirty="0" err="1">
                             <a:latin typeface="Cambria Math" panose="02040503050406030204" pitchFamily="18" charset="0"/>
                           </a:rPr>
                         </m:ctrlPr>
@@ -8558,7 +7449,7 @@
                     <m:sSup>
                       <m:sSupPr>
                         <m:ctrlPr>
-                          <a:rPr lang="pt" b="0" i="1" dirty="0">
+                          <a:rPr lang="pt" b="0" i="1" dirty="0" err="1">
                             <a:latin typeface="Cambria Math" panose="02040503050406030204" pitchFamily="18" charset="0"/>
                           </a:rPr>
                         </m:ctrlPr>
@@ -8663,7 +7554,7 @@
           <a:p>
             <a:fld id="{F7234068-C760-3747-89DD-BD27190EB64C}" type="datetime1">
               <a:rPr lang="en-US" smtClean="0"/>
-              <a:t>4/18/26</a:t>
+              <a:t>8/13/26</a:t>
             </a:fld>
             <a:endParaRPr lang="en-US"/>
           </a:p>
@@ -9051,7 +7942,7 @@
           <a:p>
             <a:fld id="{BC1FA671-5AD2-494A-9BAB-D2D9CDAD1BEC}" type="datetime1">
               <a:rPr lang="en-US" smtClean="0"/>
-              <a:t>4/18/26</a:t>
+              <a:t>8/13/26</a:t>
             </a:fld>
             <a:endParaRPr lang="en-US"/>
           </a:p>
@@ -9415,7 +8306,7 @@
           <a:p>
             <a:fld id="{6D7946B6-B9AF-4D43-8E17-2DE79EE570E1}" type="datetime1">
               <a:rPr lang="en-US" smtClean="0"/>
-              <a:t>4/18/26</a:t>
+              <a:t>8/13/26</a:t>
             </a:fld>
             <a:endParaRPr lang="en-US"/>
           </a:p>
@@ -9673,7 +8564,7 @@
           <a:p>
             <a:fld id="{D5CCC148-864C-2D4B-A4BD-6E3DD1CCB535}" type="datetime1">
               <a:rPr lang="en-US" smtClean="0"/>
-              <a:t>4/18/26</a:t>
+              <a:t>8/13/26</a:t>
             </a:fld>
             <a:endParaRPr lang="en-US"/>
           </a:p>
@@ -9883,7 +8774,7 @@
           <a:p>
             <a:fld id="{B31FEFE7-C411-7E44-8C02-BBD66DF3460D}" type="datetime1">
               <a:rPr lang="en-US" smtClean="0"/>
-              <a:t>4/18/26</a:t>
+              <a:t>8/13/26</a:t>
             </a:fld>
             <a:endParaRPr lang="en-US"/>
           </a:p>
@@ -10077,7 +8968,7 @@
                     <m:d>
                       <m:dPr>
                         <m:ctrlPr>
-                          <a:rPr lang="en-US" i="1" dirty="0">
+                          <a:rPr lang="en-US" i="1" dirty="0" err="1">
                             <a:latin typeface="Cambria Math" panose="02040503050406030204" pitchFamily="18" charset="0"/>
                           </a:rPr>
                         </m:ctrlPr>
@@ -10086,7 +8977,7 @@
                         <m:sSub>
                           <m:sSubPr>
                             <m:ctrlPr>
-                              <a:rPr lang="en-US" i="1" dirty="0" err="1">
+                              <a:rPr lang="en-US" b="1" i="0" dirty="0" err="1">
                                 <a:latin typeface="Cambria Math" panose="02040503050406030204" pitchFamily="18" charset="0"/>
                               </a:rPr>
                             </m:ctrlPr>
@@ -10119,7 +9010,7 @@
                     <m:f>
                       <m:fPr>
                         <m:ctrlPr>
-                          <a:rPr lang="en-US" i="1" dirty="0" smtClean="0">
+                          <a:rPr lang="en-US" b="0" i="1" dirty="0" smtClean="0">
                             <a:latin typeface="Cambria Math" panose="02040503050406030204" pitchFamily="18" charset="0"/>
                           </a:rPr>
                         </m:ctrlPr>
@@ -10144,7 +9035,7 @@
                     <m:sSubSup>
                       <m:sSubSupPr>
                         <m:ctrlPr>
-                          <a:rPr lang="en-US" i="1" dirty="0">
+                          <a:rPr lang="en-US" b="1" i="0" dirty="0" err="1">
                             <a:latin typeface="Cambria Math" panose="02040503050406030204" pitchFamily="18" charset="0"/>
                           </a:rPr>
                         </m:ctrlPr>
@@ -10208,7 +9099,7 @@
                     <m:sSub>
                       <m:sSubPr>
                         <m:ctrlPr>
-                          <a:rPr lang="en-US" b="1" i="1" dirty="0" err="1">
+                          <a:rPr lang="en-US" b="1" i="0" dirty="0" err="1">
                             <a:latin typeface="Cambria Math" panose="02040503050406030204" pitchFamily="18" charset="0"/>
                           </a:rPr>
                         </m:ctrlPr>
@@ -10295,7 +9186,7 @@
                     <m:sSubSup>
                       <m:sSubSupPr>
                         <m:ctrlPr>
-                          <a:rPr lang="en-US" i="1" dirty="0">
+                          <a:rPr lang="en-US" b="1" i="0" dirty="0" err="1">
                             <a:latin typeface="Cambria Math" panose="02040503050406030204" pitchFamily="18" charset="0"/>
                           </a:rPr>
                         </m:ctrlPr>
@@ -10359,7 +9250,7 @@
                     <m:sSub>
                       <m:sSubPr>
                         <m:ctrlPr>
-                          <a:rPr lang="en-US" i="1" dirty="0" err="1">
+                          <a:rPr lang="en-US" b="1" i="0" dirty="0" err="1">
                             <a:latin typeface="Cambria Math" panose="02040503050406030204" pitchFamily="18" charset="0"/>
                           </a:rPr>
                         </m:ctrlPr>
@@ -10684,7 +9575,7 @@
                     <m:sSub>
                       <m:sSubPr>
                         <m:ctrlPr>
-                          <a:rPr lang="en-US" i="1" dirty="0" err="1" smtClean="0">
+                          <a:rPr lang="en-US" i="1" dirty="0" smtClean="0">
                             <a:latin typeface="Cambria Math" panose="02040503050406030204" pitchFamily="18" charset="0"/>
                           </a:rPr>
                         </m:ctrlPr>
@@ -10715,7 +9606,7 @@
                     <m:sSub>
                       <m:sSubPr>
                         <m:ctrlPr>
-                          <a:rPr lang="en-US" i="1" dirty="0" err="1" smtClean="0">
+                          <a:rPr lang="en-US" b="1" i="0" dirty="0" err="1">
                             <a:latin typeface="Cambria Math" panose="02040503050406030204" pitchFamily="18" charset="0"/>
                           </a:rPr>
                         </m:ctrlPr>
@@ -10746,7 +9637,7 @@
                     <m:f>
                       <m:fPr>
                         <m:ctrlPr>
-                          <a:rPr lang="en-US" i="1" dirty="0" smtClean="0">
+                          <a:rPr lang="en-US" b="0" i="1" dirty="0" smtClean="0">
                             <a:latin typeface="Cambria Math" panose="02040503050406030204" pitchFamily="18" charset="0"/>
                           </a:rPr>
                         </m:ctrlPr>
@@ -10771,7 +9662,7 @@
                     <m:sSubSup>
                       <m:sSubSupPr>
                         <m:ctrlPr>
-                          <a:rPr lang="en-US" i="1" dirty="0" smtClean="0">
+                          <a:rPr lang="en-US" b="1" i="0" dirty="0" err="1">
                             <a:latin typeface="Cambria Math" panose="02040503050406030204" pitchFamily="18" charset="0"/>
                           </a:rPr>
                         </m:ctrlPr>
@@ -10810,7 +9701,7 @@
                     <m:sSub>
                       <m:sSubPr>
                         <m:ctrlPr>
-                          <a:rPr lang="en-US" i="1" dirty="0" err="1" smtClean="0">
+                          <a:rPr lang="en-US" i="1" dirty="0" err="1">
                             <a:latin typeface="Cambria Math" panose="02040503050406030204" pitchFamily="18" charset="0"/>
                           </a:rPr>
                         </m:ctrlPr>
@@ -10835,7 +9726,7 @@
                     <m:sSub>
                       <m:sSubPr>
                         <m:ctrlPr>
-                          <a:rPr lang="en-US" i="1" dirty="0" err="1">
+                          <a:rPr lang="en-US" b="1" i="0" dirty="0" err="1">
                             <a:latin typeface="Cambria Math" panose="02040503050406030204" pitchFamily="18" charset="0"/>
                           </a:rPr>
                         </m:ctrlPr>
@@ -10888,10 +9779,7 @@
                 </a:pPr>
                 <a14:m>
                   <m:oMathPara xmlns:m="http://schemas.openxmlformats.org/officeDocument/2006/math">
-                    <m:oMathParaPr>
-                      <m:jc m:val="centerGroup"/>
-                    </m:oMathParaPr>
-                    <m:oMath xmlns:m="http://schemas.openxmlformats.org/officeDocument/2006/math">
+                    <m:oMath>
                       <m:sSub>
                         <m:sSubPr>
                           <m:ctrlPr>
@@ -11322,7 +10210,7 @@
                         <m:sSub>
                           <m:sSubPr>
                             <m:ctrlPr>
-                              <a:rPr lang="en-US" i="1" dirty="0" smtClean="0">
+                              <a:rPr lang="en-US" b="1" i="0" dirty="0" smtClean="0">
                                 <a:latin typeface="Cambria Math" panose="02040503050406030204" pitchFamily="18" charset="0"/>
                               </a:rPr>
                             </m:ctrlPr>
@@ -11355,7 +10243,7 @@
                     <m:f>
                       <m:fPr>
                         <m:ctrlPr>
-                          <a:rPr lang="en-US" i="1" dirty="0" smtClean="0">
+                          <a:rPr lang="en-US" b="0" i="1" dirty="0" smtClean="0">
                             <a:latin typeface="Cambria Math" panose="02040503050406030204" pitchFamily="18" charset="0"/>
                           </a:rPr>
                         </m:ctrlPr>
@@ -11380,7 +10268,7 @@
                     <m:sSubSup>
                       <m:sSubSupPr>
                         <m:ctrlPr>
-                          <a:rPr lang="en-US" i="1" dirty="0" smtClean="0">
+                          <a:rPr lang="en-US" b="1" i="0" dirty="0">
                             <a:latin typeface="Cambria Math" panose="02040503050406030204" pitchFamily="18" charset="0"/>
                           </a:rPr>
                         </m:ctrlPr>
@@ -11438,7 +10326,7 @@
                     <m:sSub>
                       <m:sSubPr>
                         <m:ctrlPr>
-                          <a:rPr lang="en-US" i="1" dirty="0">
+                          <a:rPr lang="en-US" b="1" i="0" dirty="0">
                             <a:latin typeface="Cambria Math" panose="02040503050406030204" pitchFamily="18" charset="0"/>
                           </a:rPr>
                         </m:ctrlPr>
@@ -11533,7 +10421,7 @@
           <a:p>
             <a:fld id="{20041A89-09E2-DF40-BAE8-8023EE61C3D8}" type="datetime1">
               <a:rPr lang="en-US" smtClean="0"/>
-              <a:t>4/18/26</a:t>
+              <a:t>8/13/26</a:t>
             </a:fld>
             <a:endParaRPr lang="en-US"/>
           </a:p>
@@ -11700,7 +10588,7 @@
           <a:p>
             <a:fld id="{C48BFD19-73C7-A64C-BECA-C092D91C2BF3}" type="datetime1">
               <a:rPr lang="en-US" smtClean="0"/>
-              <a:t>4/18/26</a:t>
+              <a:t>8/13/26</a:t>
             </a:fld>
             <a:endParaRPr lang="en-US"/>
           </a:p>
@@ -11821,7 +10709,7 @@
           <a:p>
             <a:fld id="{4049B9A4-6C45-3644-BC49-213F451CC74F}" type="datetime1">
               <a:rPr lang="en-US" smtClean="0"/>
-              <a:t>4/18/26</a:t>
+              <a:t>8/13/26</a:t>
             </a:fld>
             <a:endParaRPr lang="en-US"/>
           </a:p>
@@ -14688,7 +13576,7 @@
                     <m:sSub>
                       <m:sSubPr>
                         <m:ctrlPr>
-                          <a:rPr lang="en-US" b="1" i="1" dirty="0">
+                          <a:rPr lang="en-US" b="1" dirty="0">
                             <a:latin typeface="Cambria Math" panose="02040503050406030204" pitchFamily="18" charset="0"/>
                           </a:rPr>
                         </m:ctrlPr>
@@ -14731,7 +13619,7 @@
                     <m:d>
                       <m:dPr>
                         <m:ctrlPr>
-                          <a:rPr lang="en-US" i="1" dirty="0">
+                          <a:rPr lang="en-US" b="1" i="1" dirty="0" err="1">
                             <a:latin typeface="Cambria Math" panose="02040503050406030204" pitchFamily="18" charset="0"/>
                           </a:rPr>
                         </m:ctrlPr>
@@ -14740,7 +13628,7 @@
                         <m:sSub>
                           <m:sSubPr>
                             <m:ctrlPr>
-                              <a:rPr lang="en-US" b="1" i="1" dirty="0" err="1">
+                              <a:rPr lang="en-US" b="1" dirty="0" err="1">
                                 <a:latin typeface="Cambria Math" panose="02040503050406030204" pitchFamily="18" charset="0"/>
                               </a:rPr>
                             </m:ctrlPr>
@@ -14771,7 +13659,7 @@
                         <m:sSub>
                           <m:sSubPr>
                             <m:ctrlPr>
-                              <a:rPr lang="en-US" i="1" dirty="0" err="1">
+                              <a:rPr lang="en-US" b="1" dirty="0">
                                 <a:latin typeface="Cambria Math" panose="02040503050406030204" pitchFamily="18" charset="0"/>
                               </a:rPr>
                             </m:ctrlPr>
@@ -14872,7 +13760,7 @@
                     <m:sSub>
                       <m:sSubPr>
                         <m:ctrlPr>
-                          <a:rPr lang="en-US" b="1" i="1" dirty="0">
+                          <a:rPr lang="en-US" b="1" i="0" dirty="0" smtClean="0">
                             <a:latin typeface="Cambria Math" panose="02040503050406030204" pitchFamily="18" charset="0"/>
                           </a:rPr>
                         </m:ctrlPr>
@@ -14921,7 +13809,7 @@
                     <m:sSub>
                       <m:sSubPr>
                         <m:ctrlPr>
-                          <a:rPr lang="en-US" i="1" dirty="0">
+                          <a:rPr lang="en-US" b="1" dirty="0">
                             <a:latin typeface="Cambria Math" panose="02040503050406030204" pitchFamily="18" charset="0"/>
                           </a:rPr>
                         </m:ctrlPr>
@@ -14984,7 +13872,7 @@
                     <m:oMathParaPr>
                       <m:jc m:val="center"/>
                     </m:oMathParaPr>
-                    <m:oMath xmlns:m="http://schemas.openxmlformats.org/officeDocument/2006/math">
+                    <m:oMath>
                       <m:r>
                         <a:rPr lang="en-US" i="1" dirty="0">
                           <a:latin typeface="Cambria Math" panose="02040503050406030204" pitchFamily="18" charset="0"/>
@@ -14994,7 +13882,7 @@
                       <m:sSub>
                         <m:sSubPr>
                           <m:ctrlPr>
-                            <a:rPr lang="en-US" b="1" i="1" dirty="0">
+                            <a:rPr lang="en-US" b="1" dirty="0">
                               <a:latin typeface="Cambria Math" panose="02040503050406030204" pitchFamily="18" charset="0"/>
                             </a:rPr>
                           </m:ctrlPr>
@@ -15086,13 +13974,7 @@
                             <a:rPr lang="en-US" b="0" i="1" dirty="0" smtClean="0">
                               <a:latin typeface="Cambria Math" panose="02040503050406030204" pitchFamily="18" charset="0"/>
                             </a:rPr>
-                            <m:t>−1</m:t>
-                          </m:r>
-                          <m:r>
-                            <a:rPr lang="en-US" b="1" i="1" dirty="0" smtClean="0">
-                              <a:latin typeface="Cambria Math" panose="02040503050406030204" pitchFamily="18" charset="0"/>
-                            </a:rPr>
-                            <m:t> </m:t>
+                            <m:t>−1 </m:t>
                           </m:r>
                         </m:sub>
                       </m:sSub>
@@ -15105,7 +13987,7 @@
                       <m:sSub>
                         <m:sSubPr>
                           <m:ctrlPr>
-                            <a:rPr lang="en-US" i="1" dirty="0" err="1">
+                            <a:rPr lang="en-US" b="0" i="1" dirty="0" smtClean="0">
                               <a:latin typeface="Cambria Math" panose="02040503050406030204" pitchFamily="18" charset="0"/>
                             </a:rPr>
                           </m:ctrlPr>
@@ -15115,7 +13997,7 @@
                             <a:rPr lang="en-US" b="0" i="1" dirty="0" smtClean="0">
                               <a:latin typeface="Cambria Math" panose="02040503050406030204" pitchFamily="18" charset="0"/>
                             </a:rPr>
-                            <m:t>h</m:t>
+                            <m:t>ℎ</m:t>
                           </m:r>
                         </m:e>
                         <m:sub>
@@ -15130,7 +14012,7 @@
                       <m:d>
                         <m:dPr>
                           <m:ctrlPr>
-                            <a:rPr lang="en-US" i="1" dirty="0">
+                            <a:rPr lang="en-US" b="1" i="1" dirty="0">
                               <a:latin typeface="Cambria Math" panose="02040503050406030204" pitchFamily="18" charset="0"/>
                             </a:rPr>
                           </m:ctrlPr>
@@ -15139,7 +14021,7 @@
                           <m:sSub>
                             <m:sSubPr>
                               <m:ctrlPr>
-                                <a:rPr lang="en-US" b="1" i="1" dirty="0">
+                                <a:rPr lang="en-US" b="1" dirty="0">
                                   <a:latin typeface="Cambria Math" panose="02040503050406030204" pitchFamily="18" charset="0"/>
                                 </a:rPr>
                               </m:ctrlPr>
@@ -15219,7 +14101,7 @@
                           <m:d>
                             <m:dPr>
                               <m:ctrlPr>
-                                <a:rPr lang="en-US" i="1" dirty="0">
+                                <a:rPr lang="en-US" b="1" i="1" dirty="0" err="1">
                                   <a:latin typeface="Cambria Math" panose="02040503050406030204" pitchFamily="18" charset="0"/>
                                 </a:rPr>
                               </m:ctrlPr>
@@ -15228,7 +14110,7 @@
                               <m:sSub>
                                 <m:sSubPr>
                                   <m:ctrlPr>
-                                    <a:rPr lang="en-US" b="1" i="1" dirty="0" err="1">
+                                    <a:rPr lang="en-US" b="1" dirty="0" err="1">
                                       <a:latin typeface="Cambria Math" panose="02040503050406030204" pitchFamily="18" charset="0"/>
                                     </a:rPr>
                                   </m:ctrlPr>
@@ -15259,7 +14141,7 @@
                               <m:sSub>
                                 <m:sSubPr>
                                   <m:ctrlPr>
-                                    <a:rPr lang="en-US" i="1" dirty="0" err="1">
+                                    <a:rPr lang="en-US" b="1" i="0" dirty="0" smtClean="0">
                                       <a:latin typeface="Cambria Math" panose="02040503050406030204" pitchFamily="18" charset="0"/>
                                     </a:rPr>
                                   </m:ctrlPr>
@@ -15343,7 +14225,7 @@
                     <m:sSubSup>
                       <m:sSubSupPr>
                         <m:ctrlPr>
-                          <a:rPr lang="en-US" sz="2800" b="1" i="1" dirty="0" smtClean="0">
+                          <a:rPr lang="en-US" sz="2800" b="1" dirty="0">
                             <a:latin typeface="Cambria Math" panose="02040503050406030204" pitchFamily="18" charset="0"/>
                           </a:rPr>
                         </m:ctrlPr>
@@ -15413,7 +14295,7 @@
                     <m:sSub>
                       <m:sSubPr>
                         <m:ctrlPr>
-                          <a:rPr lang="en-US" b="1" i="1" dirty="0">
+                          <a:rPr lang="en-US" b="1" dirty="0" err="1">
                             <a:latin typeface="Cambria Math" panose="02040503050406030204" pitchFamily="18" charset="0"/>
                           </a:rPr>
                         </m:ctrlPr>
@@ -15451,7 +14333,7 @@
                       <m:rPr>
                         <m:nor/>
                       </m:rPr>
-                      <a:rPr lang="en-US" dirty="0">
+                      <a:rPr lang="en-US" i="0" dirty="0">
                         <a:latin typeface="Source Sans Pro" panose="020B0503030403020204" pitchFamily="34" charset="0"/>
                         <a:ea typeface="Source Sans Pro" panose="020B0503030403020204" pitchFamily="34" charset="0"/>
                       </a:rPr>
@@ -15507,7 +14389,7 @@
                     <m:sSub>
                       <m:sSubPr>
                         <m:ctrlPr>
-                          <a:rPr lang="en-US" b="1" i="1" dirty="0">
+                          <a:rPr lang="en-US" b="1" dirty="0" err="1">
                             <a:latin typeface="Cambria Math" panose="02040503050406030204" pitchFamily="18" charset="0"/>
                           </a:rPr>
                         </m:ctrlPr>
@@ -15612,7 +14494,7 @@
           <a:p>
             <a:fld id="{A40E84A6-72BB-9442-A9F4-67BA6681CF02}" type="datetime1">
               <a:rPr lang="en-US" smtClean="0"/>
-              <a:t>4/18/26</a:t>
+              <a:t>8/13/26</a:t>
             </a:fld>
             <a:endParaRPr lang="en-US"/>
           </a:p>
@@ -16184,7 +15066,7 @@
           <a:p>
             <a:fld id="{40C659E6-2BFB-4447-966F-9E3E12A5317C}" type="datetime1">
               <a:rPr lang="en-US" smtClean="0"/>
-              <a:t>4/18/26</a:t>
+              <a:t>8/13/26</a:t>
             </a:fld>
             <a:endParaRPr lang="en-US"/>
           </a:p>
@@ -16942,10 +15824,7 @@
                 </a:pPr>
                 <a14:m>
                   <m:oMathPara xmlns:m="http://schemas.openxmlformats.org/officeDocument/2006/math">
-                    <m:oMathParaPr>
-                      <m:jc m:val="centerGroup"/>
-                    </m:oMathParaPr>
-                    <m:oMath xmlns:m="http://schemas.openxmlformats.org/officeDocument/2006/math">
+                    <m:oMath>
                       <m:sSub>
                         <m:sSubPr>
                           <m:ctrlPr>
@@ -17276,7 +16155,7 @@
           <a:p>
             <a:fld id="{B86CB7B5-BAE2-5047-9260-7799B1BE806E}" type="datetime1">
               <a:rPr lang="en-US" smtClean="0"/>
-              <a:t>4/18/26</a:t>
+              <a:t>8/13/26</a:t>
             </a:fld>
             <a:endParaRPr lang="en-US"/>
           </a:p>
@@ -17730,7 +16609,7 @@
                     <m:sSubSup>
                       <m:sSubSupPr>
                         <m:ctrlPr>
-                          <a:rPr lang="en-US" sz="2600" i="1" dirty="0">
+                          <a:rPr lang="en-US" sz="2600" b="1" i="0" dirty="0" smtClean="0">
                             <a:latin typeface="Cambria Math" panose="02040503050406030204" pitchFamily="18" charset="0"/>
                           </a:rPr>
                         </m:ctrlPr>
@@ -17769,7 +16648,7 @@
                     <m:sSubSup>
                       <m:sSubSupPr>
                         <m:ctrlPr>
-                          <a:rPr lang="en-US" sz="2600" i="1" dirty="0">
+                          <a:rPr lang="en-US" sz="2600" b="1" i="0" dirty="0" smtClean="0">
                             <a:latin typeface="Cambria Math" panose="02040503050406030204" pitchFamily="18" charset="0"/>
                           </a:rPr>
                         </m:ctrlPr>
@@ -17820,7 +16699,7 @@
                     <m:sSubSup>
                       <m:sSubSupPr>
                         <m:ctrlPr>
-                          <a:rPr lang="en-US" sz="2600" i="1" dirty="0" smtClean="0">
+                          <a:rPr lang="en-US" sz="2600" b="1" i="0" dirty="0" smtClean="0">
                             <a:latin typeface="Cambria Math" panose="02040503050406030204" pitchFamily="18" charset="0"/>
                           </a:rPr>
                         </m:ctrlPr>
@@ -17876,7 +16755,7 @@
                     <m:sSubSup>
                       <m:sSubSupPr>
                         <m:ctrlPr>
-                          <a:rPr lang="en-US" sz="2600" i="1" dirty="0">
+                          <a:rPr lang="en-US" sz="2600" b="1" i="0" dirty="0" smtClean="0">
                             <a:latin typeface="Cambria Math" panose="02040503050406030204" pitchFamily="18" charset="0"/>
                           </a:rPr>
                         </m:ctrlPr>
@@ -17929,7 +16808,7 @@
                     <m:sSubSup>
                       <m:sSubSupPr>
                         <m:ctrlPr>
-                          <a:rPr lang="en-US" sz="2600" i="1" dirty="0">
+                          <a:rPr lang="en-US" sz="2600" b="1" i="0" dirty="0" smtClean="0">
                             <a:latin typeface="Cambria Math" panose="02040503050406030204" pitchFamily="18" charset="0"/>
                           </a:rPr>
                         </m:ctrlPr>
@@ -17968,7 +16847,7 @@
                     <m:sSubSup>
                       <m:sSubSupPr>
                         <m:ctrlPr>
-                          <a:rPr lang="en-US" sz="2600" i="1" dirty="0">
+                          <a:rPr lang="en-US" sz="2600" b="1" i="0" dirty="0" smtClean="0">
                             <a:latin typeface="Cambria Math" panose="02040503050406030204" pitchFamily="18" charset="0"/>
                           </a:rPr>
                         </m:ctrlPr>
@@ -18007,7 +16886,7 @@
                     <m:sSubSup>
                       <m:sSubSupPr>
                         <m:ctrlPr>
-                          <a:rPr lang="en-US" sz="2600" i="1" dirty="0">
+                          <a:rPr lang="en-US" sz="2600" b="1" i="0" dirty="0" smtClean="0">
                             <a:latin typeface="Cambria Math" panose="02040503050406030204" pitchFamily="18" charset="0"/>
                           </a:rPr>
                         </m:ctrlPr>
@@ -18057,7 +16936,7 @@
                     <m:sSubSup>
                       <m:sSubSupPr>
                         <m:ctrlPr>
-                          <a:rPr lang="en-US" sz="2600" b="1" i="1" dirty="0" smtClean="0">
+                          <a:rPr lang="en-US" sz="2600" b="1" dirty="0">
                             <a:latin typeface="Cambria Math" panose="02040503050406030204" pitchFamily="18" charset="0"/>
                           </a:rPr>
                         </m:ctrlPr>
@@ -18218,7 +17097,7 @@
                     <m:d>
                       <m:dPr>
                         <m:ctrlPr>
-                          <a:rPr lang="en-US" sz="2600" i="1" dirty="0">
+                          <a:rPr lang="en-US" sz="2600" b="1" i="1" dirty="0" smtClean="0">
                             <a:latin typeface="Cambria Math" panose="02040503050406030204" pitchFamily="18" charset="0"/>
                           </a:rPr>
                         </m:ctrlPr>
@@ -18227,7 +17106,7 @@
                         <m:sSubSup>
                           <m:sSubSupPr>
                             <m:ctrlPr>
-                              <a:rPr lang="en-US" sz="2600" b="1" i="1" dirty="0" smtClean="0">
+                              <a:rPr lang="en-US" sz="2600" b="1" dirty="0" err="1">
                                 <a:latin typeface="Cambria Math" panose="02040503050406030204" pitchFamily="18" charset="0"/>
                               </a:rPr>
                             </m:ctrlPr>
@@ -18266,7 +17145,7 @@
                         <m:sSub>
                           <m:sSubPr>
                             <m:ctrlPr>
-                              <a:rPr lang="en-US" sz="2600" i="1" dirty="0" err="1">
+                              <a:rPr lang="en-US" sz="2600" b="1" dirty="0">
                                 <a:latin typeface="Cambria Math" panose="02040503050406030204" pitchFamily="18" charset="0"/>
                               </a:rPr>
                             </m:ctrlPr>
@@ -18306,7 +17185,7 @@
                       <m:naryPr>
                         <m:chr m:val="∑"/>
                         <m:ctrlPr>
-                          <a:rPr lang="en-US" sz="2600" i="1" dirty="0">
+                          <a:rPr lang="en-US" sz="2600" b="0" i="1" dirty="0" smtClean="0">
                             <a:latin typeface="Cambria Math" panose="02040503050406030204" pitchFamily="18" charset="0"/>
                           </a:rPr>
                         </m:ctrlPr>
@@ -18386,7 +17265,7 @@
                         <m:d>
                           <m:dPr>
                             <m:ctrlPr>
-                              <a:rPr lang="en-US" sz="2600" i="1" dirty="0">
+                              <a:rPr lang="en-US" sz="2600" b="1" i="1" dirty="0" err="1">
                                 <a:latin typeface="Cambria Math" panose="02040503050406030204" pitchFamily="18" charset="0"/>
                               </a:rPr>
                             </m:ctrlPr>
@@ -18395,7 +17274,7 @@
                             <m:sSub>
                               <m:sSubPr>
                                 <m:ctrlPr>
-                                  <a:rPr lang="en-US" sz="2600" b="1" i="1" dirty="0" err="1">
+                                  <a:rPr lang="en-US" sz="2600" b="1" dirty="0" err="1">
                                     <a:latin typeface="Cambria Math" panose="02040503050406030204" pitchFamily="18" charset="0"/>
                                   </a:rPr>
                                 </m:ctrlPr>
@@ -18432,7 +17311,7 @@
                             <m:sSub>
                               <m:sSubPr>
                                 <m:ctrlPr>
-                                  <a:rPr lang="en-US" sz="2600" i="1" dirty="0" err="1">
+                                  <a:rPr lang="en-US" sz="2600" b="1" dirty="0">
                                     <a:latin typeface="Cambria Math" panose="02040503050406030204" pitchFamily="18" charset="0"/>
                                   </a:rPr>
                                 </m:ctrlPr>
@@ -18476,7 +17355,7 @@
                     <m:sSub>
                       <m:sSubPr>
                         <m:ctrlPr>
-                          <a:rPr lang="en-US" sz="2600" i="1" dirty="0" err="1">
+                          <a:rPr lang="en-US" sz="2600" b="0" i="1" dirty="0" smtClean="0">
                             <a:latin typeface="Cambria Math" panose="02040503050406030204" pitchFamily="18" charset="0"/>
                           </a:rPr>
                         </m:ctrlPr>
@@ -18486,7 +17365,7 @@
                           <a:rPr lang="en-US" sz="2600" b="0" i="1" dirty="0" smtClean="0">
                             <a:latin typeface="Cambria Math" panose="02040503050406030204" pitchFamily="18" charset="0"/>
                           </a:rPr>
-                          <m:t>h</m:t>
+                          <m:t>ℎ</m:t>
                         </m:r>
                       </m:e>
                       <m:sub>
@@ -18501,7 +17380,7 @@
                     <m:d>
                       <m:dPr>
                         <m:ctrlPr>
-                          <a:rPr lang="en-US" sz="2600" i="1" dirty="0">
+                          <a:rPr lang="en-US" sz="2600" b="1" i="1" dirty="0">
                             <a:latin typeface="Cambria Math" panose="02040503050406030204" pitchFamily="18" charset="0"/>
                           </a:rPr>
                         </m:ctrlPr>
@@ -18510,7 +17389,7 @@
                         <m:sSub>
                           <m:sSubPr>
                             <m:ctrlPr>
-                              <a:rPr lang="en-US" sz="2600" b="1" i="1" dirty="0">
+                              <a:rPr lang="en-US" sz="2600" b="1" dirty="0">
                                 <a:latin typeface="Cambria Math" panose="02040503050406030204" pitchFamily="18" charset="0"/>
                               </a:rPr>
                             </m:ctrlPr>
@@ -18575,7 +17454,7 @@
                     <m:sSubSup>
                       <m:sSubSupPr>
                         <m:ctrlPr>
-                          <a:rPr lang="en-US" sz="2600" i="1" dirty="0">
+                          <a:rPr lang="en-US" sz="2600" b="1" i="0" dirty="0" smtClean="0">
                             <a:latin typeface="Cambria Math" panose="02040503050406030204" pitchFamily="18" charset="0"/>
                           </a:rPr>
                         </m:ctrlPr>
@@ -18614,7 +17493,7 @@
                     <m:sSubSup>
                       <m:sSubSupPr>
                         <m:ctrlPr>
-                          <a:rPr lang="en-US" sz="2600" i="1" dirty="0">
+                          <a:rPr lang="en-US" sz="2600" b="1" i="0" dirty="0" smtClean="0">
                             <a:latin typeface="Cambria Math" panose="02040503050406030204" pitchFamily="18" charset="0"/>
                           </a:rPr>
                         </m:ctrlPr>
@@ -18659,7 +17538,7 @@
                     <m:sSubSup>
                       <m:sSubSupPr>
                         <m:ctrlPr>
-                          <a:rPr lang="en-US" sz="2600" i="1" dirty="0">
+                          <a:rPr lang="en-US" sz="2600" b="1" i="0" dirty="0" smtClean="0">
                             <a:latin typeface="Cambria Math" panose="02040503050406030204" pitchFamily="18" charset="0"/>
                           </a:rPr>
                         </m:ctrlPr>
@@ -18823,7 +17702,7 @@
           <a:p>
             <a:fld id="{1B29A629-B1C9-BD4C-A831-E8E6D785349C}" type="datetime1">
               <a:rPr lang="en-US" smtClean="0"/>
-              <a:t>4/18/26</a:t>
+              <a:t>8/13/26</a:t>
             </a:fld>
             <a:endParaRPr lang="en-US"/>
           </a:p>
@@ -18968,7 +17847,7 @@
           <a:p>
             <a:fld id="{7D7BD294-5C28-4342-9753-6813AEB6C8E7}" type="datetime1">
               <a:rPr lang="en-US" smtClean="0"/>
-              <a:t>4/18/26</a:t>
+              <a:t>8/13/26</a:t>
             </a:fld>
             <a:endParaRPr lang="en-US"/>
           </a:p>
@@ -19263,14 +18142,11 @@
                 <a:pPr/>
                 <a14:m>
                   <m:oMathPara xmlns:m="http://schemas.openxmlformats.org/officeDocument/2006/math">
-                    <m:oMathParaPr>
-                      <m:jc m:val="centerGroup"/>
-                    </m:oMathParaPr>
-                    <m:oMath xmlns:m="http://schemas.openxmlformats.org/officeDocument/2006/math">
+                    <m:oMath>
                       <m:sSub>
                         <m:sSubPr>
                           <m:ctrlPr>
-                            <a:rPr lang="en-US" sz="2800" i="1">
+                            <a:rPr lang="en-US" sz="2800" b="0" i="1" smtClean="0">
                               <a:latin typeface="Cambria Math" panose="02040503050406030204" pitchFamily="18" charset="0"/>
                               <a:ea typeface="Source Sans Pro" panose="020B0503030403020204" pitchFamily="34" charset="0"/>
                             </a:rPr>
@@ -19414,10 +18290,7 @@
                 <a:pPr/>
                 <a14:m>
                   <m:oMathPara xmlns:m="http://schemas.openxmlformats.org/officeDocument/2006/math">
-                    <m:oMathParaPr>
-                      <m:jc m:val="centerGroup"/>
-                    </m:oMathParaPr>
-                    <m:oMath xmlns:m="http://schemas.openxmlformats.org/officeDocument/2006/math">
+                    <m:oMath>
                       <m:sSub>
                         <m:sSubPr>
                           <m:ctrlPr>
@@ -19551,10 +18424,7 @@
                 <a:pPr/>
                 <a14:m>
                   <m:oMathPara xmlns:m="http://schemas.openxmlformats.org/officeDocument/2006/math">
-                    <m:oMathParaPr>
-                      <m:jc m:val="centerGroup"/>
-                    </m:oMathParaPr>
-                    <m:oMath xmlns:m="http://schemas.openxmlformats.org/officeDocument/2006/math">
+                    <m:oMath>
                       <m:sSub>
                         <m:sSubPr>
                           <m:ctrlPr>
@@ -20034,7 +18904,7 @@
           <a:p>
             <a:fld id="{DB0E980A-CB93-4746-BC1C-9D256F0B9D21}" type="datetime1">
               <a:rPr lang="en-US" smtClean="0"/>
-              <a:t>4/18/26</a:t>
+              <a:t>8/13/26</a:t>
             </a:fld>
             <a:endParaRPr lang="en-US"/>
           </a:p>
@@ -20150,7 +19020,7 @@
           <a:p>
             <a:fld id="{05F028B9-0550-144E-B323-62B14E431B95}" type="datetime1">
               <a:rPr lang="en-US" smtClean="0"/>
-              <a:t>4/18/26</a:t>
+              <a:t>8/13/26</a:t>
             </a:fld>
             <a:endParaRPr lang="en-US"/>
           </a:p>
@@ -20310,7 +19180,7 @@
                       <a:rPr lang="en-US" sz="2800" i="1" dirty="0" smtClean="0">
                         <a:latin typeface="Cambria Math" panose="02040503050406030204" pitchFamily="18" charset="0"/>
                       </a:rPr>
-                      <m:t>h</m:t>
+                      <m:t>ℎ</m:t>
                     </m:r>
                   </m:oMath>
                 </a14:m>
